--- a/docs/结构件自动核价平台-简介.pptx
+++ b/docs/结构件自动核价平台-简介.pptx
@@ -5,17 +5,17 @@
     <p:sldMasterId id="2147483648" r:id="rId1"/>
   </p:sldMasterIdLst>
   <p:sldIdLst>
-    <p:sldId id="256" r:id="rId7"/>
-    <p:sldId id="257" r:id="rId8"/>
-    <p:sldId id="258" r:id="rId9"/>
-    <p:sldId id="259" r:id="rId10"/>
-    <p:sldId id="260" r:id="rId11"/>
-    <p:sldId id="261" r:id="rId12"/>
-    <p:sldId id="262" r:id="rId13"/>
-    <p:sldId id="263" r:id="rId14"/>
-    <p:sldId id="264" r:id="rId15"/>
+    <p:sldId id="256" r:id="rId2"/>
+    <p:sldId id="257" r:id="rId3"/>
+    <p:sldId id="258" r:id="rId4"/>
+    <p:sldId id="259" r:id="rId5"/>
+    <p:sldId id="260" r:id="rId6"/>
+    <p:sldId id="261" r:id="rId7"/>
+    <p:sldId id="262" r:id="rId8"/>
+    <p:sldId id="263" r:id="rId9"/>
+    <p:sldId id="264" r:id="rId10"/>
   </p:sldIdLst>
-  <p:sldSz cx="12191695" cy="6858000" type="screen4x3"/>
+  <p:sldSz cx="12192000" cy="6858000"/>
   <p:notesSz cx="6858000" cy="9144000"/>
   <p:defaultTextStyle>
     <a:defPPr>
@@ -112,6 +112,22 @@
       </a:defRPr>
     </a:lvl9pPr>
   </p:defaultTextStyle>
+  <p:extLst>
+    <p:ext uri="{EFAFB233-063F-42B5-8137-9DF3F51BA10A}">
+      <p15:sldGuideLst xmlns:p15="http://schemas.microsoft.com/office/powerpoint/2012/main">
+        <p15:guide id="1" orient="horz" pos="2160">
+          <p15:clr>
+            <a:srgbClr val="A4A3A4"/>
+          </p15:clr>
+        </p15:guide>
+        <p15:guide id="2" pos="2880">
+          <p15:clr>
+            <a:srgbClr val="A4A3A4"/>
+          </p15:clr>
+        </p15:guide>
+      </p15:sldGuideLst>
+    </p:ext>
+  </p:extLst>
 </p:presentation>
 </file>
 
@@ -153,10 +169,9 @@
           <a:lstStyle/>
           <a:p>
             <a:r>
-              <a:rPr lang="en-US" smtClean="0"/>
+              <a:rPr lang="en-US"/>
               <a:t>Click to edit Master title style</a:t>
             </a:r>
-            <a:endParaRPr lang="en-US"/>
           </a:p>
         </p:txBody>
       </p:sp>
@@ -272,10 +287,9 @@
           </a:lstStyle>
           <a:p>
             <a:r>
-              <a:rPr lang="en-US" smtClean="0"/>
+              <a:rPr lang="en-US"/>
               <a:t>Click to edit Master subtitle style</a:t>
             </a:r>
-            <a:endParaRPr lang="en-US"/>
           </a:p>
         </p:txBody>
       </p:sp>
@@ -296,7 +310,7 @@
           <a:p>
             <a:fld id="{5BCAD085-E8A6-8845-BD4E-CB4CCA059FC4}" type="datetimeFigureOut">
               <a:rPr lang="en-US" smtClean="0"/>
-              <a:t>1/27/13</a:t>
+              <a:t>10/10/2026</a:t>
             </a:fld>
             <a:endParaRPr lang="en-US"/>
           </a:p>
@@ -390,10 +404,9 @@
           <a:lstStyle/>
           <a:p>
             <a:r>
-              <a:rPr lang="en-US" smtClean="0"/>
+              <a:rPr lang="en-US"/>
               <a:t>Click to edit Master title style</a:t>
             </a:r>
-            <a:endParaRPr lang="en-US"/>
           </a:p>
         </p:txBody>
       </p:sp>
@@ -414,38 +427,37 @@
           <a:p>
             <a:pPr lvl="0"/>
             <a:r>
-              <a:rPr lang="en-US" smtClean="0"/>
+              <a:rPr lang="en-US"/>
               <a:t>Click to edit Master text styles</a:t>
             </a:r>
           </a:p>
           <a:p>
             <a:pPr lvl="1"/>
             <a:r>
-              <a:rPr lang="en-US" smtClean="0"/>
+              <a:rPr lang="en-US"/>
               <a:t>Second level</a:t>
             </a:r>
           </a:p>
           <a:p>
             <a:pPr lvl="2"/>
             <a:r>
-              <a:rPr lang="en-US" smtClean="0"/>
+              <a:rPr lang="en-US"/>
               <a:t>Third level</a:t>
             </a:r>
           </a:p>
           <a:p>
             <a:pPr lvl="3"/>
             <a:r>
-              <a:rPr lang="en-US" smtClean="0"/>
+              <a:rPr lang="en-US"/>
               <a:t>Fourth level</a:t>
             </a:r>
           </a:p>
           <a:p>
             <a:pPr lvl="4"/>
             <a:r>
-              <a:rPr lang="en-US" smtClean="0"/>
+              <a:rPr lang="en-US"/>
               <a:t>Fifth level</a:t>
             </a:r>
-            <a:endParaRPr lang="en-US"/>
           </a:p>
         </p:txBody>
       </p:sp>
@@ -466,7 +478,7 @@
           <a:p>
             <a:fld id="{5BCAD085-E8A6-8845-BD4E-CB4CCA059FC4}" type="datetimeFigureOut">
               <a:rPr lang="en-US" smtClean="0"/>
-              <a:t>1/27/13</a:t>
+              <a:t>10/10/2026</a:t>
             </a:fld>
             <a:endParaRPr lang="en-US"/>
           </a:p>
@@ -565,10 +577,9 @@
           <a:lstStyle/>
           <a:p>
             <a:r>
-              <a:rPr lang="en-US" smtClean="0"/>
+              <a:rPr lang="en-US"/>
               <a:t>Click to edit Master title style</a:t>
             </a:r>
-            <a:endParaRPr lang="en-US"/>
           </a:p>
         </p:txBody>
       </p:sp>
@@ -594,38 +605,37 @@
           <a:p>
             <a:pPr lvl="0"/>
             <a:r>
-              <a:rPr lang="en-US" smtClean="0"/>
+              <a:rPr lang="en-US"/>
               <a:t>Click to edit Master text styles</a:t>
             </a:r>
           </a:p>
           <a:p>
             <a:pPr lvl="1"/>
             <a:r>
-              <a:rPr lang="en-US" smtClean="0"/>
+              <a:rPr lang="en-US"/>
               <a:t>Second level</a:t>
             </a:r>
           </a:p>
           <a:p>
             <a:pPr lvl="2"/>
             <a:r>
-              <a:rPr lang="en-US" smtClean="0"/>
+              <a:rPr lang="en-US"/>
               <a:t>Third level</a:t>
             </a:r>
           </a:p>
           <a:p>
             <a:pPr lvl="3"/>
             <a:r>
-              <a:rPr lang="en-US" smtClean="0"/>
+              <a:rPr lang="en-US"/>
               <a:t>Fourth level</a:t>
             </a:r>
           </a:p>
           <a:p>
             <a:pPr lvl="4"/>
             <a:r>
-              <a:rPr lang="en-US" smtClean="0"/>
+              <a:rPr lang="en-US"/>
               <a:t>Fifth level</a:t>
             </a:r>
-            <a:endParaRPr lang="en-US"/>
           </a:p>
         </p:txBody>
       </p:sp>
@@ -646,7 +656,7 @@
           <a:p>
             <a:fld id="{5BCAD085-E8A6-8845-BD4E-CB4CCA059FC4}" type="datetimeFigureOut">
               <a:rPr lang="en-US" smtClean="0"/>
-              <a:t>1/27/13</a:t>
+              <a:t>10/10/2026</a:t>
             </a:fld>
             <a:endParaRPr lang="en-US"/>
           </a:p>
@@ -740,10 +750,9 @@
           <a:lstStyle/>
           <a:p>
             <a:r>
-              <a:rPr lang="en-US" smtClean="0"/>
+              <a:rPr lang="en-US"/>
               <a:t>Click to edit Master title style</a:t>
             </a:r>
-            <a:endParaRPr lang="en-US"/>
           </a:p>
         </p:txBody>
       </p:sp>
@@ -764,38 +773,37 @@
           <a:p>
             <a:pPr lvl="0"/>
             <a:r>
-              <a:rPr lang="en-US" smtClean="0"/>
+              <a:rPr lang="en-US"/>
               <a:t>Click to edit Master text styles</a:t>
             </a:r>
           </a:p>
           <a:p>
             <a:pPr lvl="1"/>
             <a:r>
-              <a:rPr lang="en-US" smtClean="0"/>
+              <a:rPr lang="en-US"/>
               <a:t>Second level</a:t>
             </a:r>
           </a:p>
           <a:p>
             <a:pPr lvl="2"/>
             <a:r>
-              <a:rPr lang="en-US" smtClean="0"/>
+              <a:rPr lang="en-US"/>
               <a:t>Third level</a:t>
             </a:r>
           </a:p>
           <a:p>
             <a:pPr lvl="3"/>
             <a:r>
-              <a:rPr lang="en-US" smtClean="0"/>
+              <a:rPr lang="en-US"/>
               <a:t>Fourth level</a:t>
             </a:r>
           </a:p>
           <a:p>
             <a:pPr lvl="4"/>
             <a:r>
-              <a:rPr lang="en-US" smtClean="0"/>
+              <a:rPr lang="en-US"/>
               <a:t>Fifth level</a:t>
             </a:r>
-            <a:endParaRPr lang="en-US"/>
           </a:p>
         </p:txBody>
       </p:sp>
@@ -816,7 +824,7 @@
           <a:p>
             <a:fld id="{5BCAD085-E8A6-8845-BD4E-CB4CCA059FC4}" type="datetimeFigureOut">
               <a:rPr lang="en-US" smtClean="0"/>
-              <a:t>1/27/13</a:t>
+              <a:t>10/10/2026</a:t>
             </a:fld>
             <a:endParaRPr lang="en-US"/>
           </a:p>
@@ -919,10 +927,9 @@
           </a:lstStyle>
           <a:p>
             <a:r>
-              <a:rPr lang="en-US" smtClean="0"/>
+              <a:rPr lang="en-US"/>
               <a:t>Click to edit Master title style</a:t>
             </a:r>
-            <a:endParaRPr lang="en-US"/>
           </a:p>
         </p:txBody>
       </p:sp>
@@ -1039,7 +1046,7 @@
           <a:p>
             <a:pPr lvl="0"/>
             <a:r>
-              <a:rPr lang="en-US" smtClean="0"/>
+              <a:rPr lang="en-US"/>
               <a:t>Click to edit Master text styles</a:t>
             </a:r>
           </a:p>
@@ -1062,7 +1069,7 @@
           <a:p>
             <a:fld id="{5BCAD085-E8A6-8845-BD4E-CB4CCA059FC4}" type="datetimeFigureOut">
               <a:rPr lang="en-US" smtClean="0"/>
-              <a:t>1/27/13</a:t>
+              <a:t>10/10/2026</a:t>
             </a:fld>
             <a:endParaRPr lang="en-US"/>
           </a:p>
@@ -1156,10 +1163,9 @@
           <a:lstStyle/>
           <a:p>
             <a:r>
-              <a:rPr lang="en-US" smtClean="0"/>
+              <a:rPr lang="en-US"/>
               <a:t>Click to edit Master title style</a:t>
             </a:r>
-            <a:endParaRPr lang="en-US"/>
           </a:p>
         </p:txBody>
       </p:sp>
@@ -1213,38 +1219,37 @@
           <a:p>
             <a:pPr lvl="0"/>
             <a:r>
-              <a:rPr lang="en-US" smtClean="0"/>
+              <a:rPr lang="en-US"/>
               <a:t>Click to edit Master text styles</a:t>
             </a:r>
           </a:p>
           <a:p>
             <a:pPr lvl="1"/>
             <a:r>
-              <a:rPr lang="en-US" smtClean="0"/>
+              <a:rPr lang="en-US"/>
               <a:t>Second level</a:t>
             </a:r>
           </a:p>
           <a:p>
             <a:pPr lvl="2"/>
             <a:r>
-              <a:rPr lang="en-US" smtClean="0"/>
+              <a:rPr lang="en-US"/>
               <a:t>Third level</a:t>
             </a:r>
           </a:p>
           <a:p>
             <a:pPr lvl="3"/>
             <a:r>
-              <a:rPr lang="en-US" smtClean="0"/>
+              <a:rPr lang="en-US"/>
               <a:t>Fourth level</a:t>
             </a:r>
           </a:p>
           <a:p>
             <a:pPr lvl="4"/>
             <a:r>
-              <a:rPr lang="en-US" smtClean="0"/>
+              <a:rPr lang="en-US"/>
               <a:t>Fifth level</a:t>
             </a:r>
-            <a:endParaRPr lang="en-US"/>
           </a:p>
         </p:txBody>
       </p:sp>
@@ -1298,38 +1303,37 @@
           <a:p>
             <a:pPr lvl="0"/>
             <a:r>
-              <a:rPr lang="en-US" smtClean="0"/>
+              <a:rPr lang="en-US"/>
               <a:t>Click to edit Master text styles</a:t>
             </a:r>
           </a:p>
           <a:p>
             <a:pPr lvl="1"/>
             <a:r>
-              <a:rPr lang="en-US" smtClean="0"/>
+              <a:rPr lang="en-US"/>
               <a:t>Second level</a:t>
             </a:r>
           </a:p>
           <a:p>
             <a:pPr lvl="2"/>
             <a:r>
-              <a:rPr lang="en-US" smtClean="0"/>
+              <a:rPr lang="en-US"/>
               <a:t>Third level</a:t>
             </a:r>
           </a:p>
           <a:p>
             <a:pPr lvl="3"/>
             <a:r>
-              <a:rPr lang="en-US" smtClean="0"/>
+              <a:rPr lang="en-US"/>
               <a:t>Fourth level</a:t>
             </a:r>
           </a:p>
           <a:p>
             <a:pPr lvl="4"/>
             <a:r>
-              <a:rPr lang="en-US" smtClean="0"/>
+              <a:rPr lang="en-US"/>
               <a:t>Fifth level</a:t>
             </a:r>
-            <a:endParaRPr lang="en-US"/>
           </a:p>
         </p:txBody>
       </p:sp>
@@ -1350,7 +1354,7 @@
           <a:p>
             <a:fld id="{5BCAD085-E8A6-8845-BD4E-CB4CCA059FC4}" type="datetimeFigureOut">
               <a:rPr lang="en-US" smtClean="0"/>
-              <a:t>1/27/13</a:t>
+              <a:t>10/10/2026</a:t>
             </a:fld>
             <a:endParaRPr lang="en-US"/>
           </a:p>
@@ -1448,10 +1452,9 @@
           </a:lstStyle>
           <a:p>
             <a:r>
-              <a:rPr lang="en-US" smtClean="0"/>
+              <a:rPr lang="en-US"/>
               <a:t>Click to edit Master title style</a:t>
             </a:r>
-            <a:endParaRPr lang="en-US"/>
           </a:p>
         </p:txBody>
       </p:sp>
@@ -1514,7 +1517,7 @@
           <a:p>
             <a:pPr lvl="0"/>
             <a:r>
-              <a:rPr lang="en-US" smtClean="0"/>
+              <a:rPr lang="en-US"/>
               <a:t>Click to edit Master text styles</a:t>
             </a:r>
           </a:p>
@@ -1570,38 +1573,37 @@
           <a:p>
             <a:pPr lvl="0"/>
             <a:r>
-              <a:rPr lang="en-US" smtClean="0"/>
+              <a:rPr lang="en-US"/>
               <a:t>Click to edit Master text styles</a:t>
             </a:r>
           </a:p>
           <a:p>
             <a:pPr lvl="1"/>
             <a:r>
-              <a:rPr lang="en-US" smtClean="0"/>
+              <a:rPr lang="en-US"/>
               <a:t>Second level</a:t>
             </a:r>
           </a:p>
           <a:p>
             <a:pPr lvl="2"/>
             <a:r>
-              <a:rPr lang="en-US" smtClean="0"/>
+              <a:rPr lang="en-US"/>
               <a:t>Third level</a:t>
             </a:r>
           </a:p>
           <a:p>
             <a:pPr lvl="3"/>
             <a:r>
-              <a:rPr lang="en-US" smtClean="0"/>
+              <a:rPr lang="en-US"/>
               <a:t>Fourth level</a:t>
             </a:r>
           </a:p>
           <a:p>
             <a:pPr lvl="4"/>
             <a:r>
-              <a:rPr lang="en-US" smtClean="0"/>
+              <a:rPr lang="en-US"/>
               <a:t>Fifth level</a:t>
             </a:r>
-            <a:endParaRPr lang="en-US"/>
           </a:p>
         </p:txBody>
       </p:sp>
@@ -1664,7 +1666,7 @@
           <a:p>
             <a:pPr lvl="0"/>
             <a:r>
-              <a:rPr lang="en-US" smtClean="0"/>
+              <a:rPr lang="en-US"/>
               <a:t>Click to edit Master text styles</a:t>
             </a:r>
           </a:p>
@@ -1720,38 +1722,37 @@
           <a:p>
             <a:pPr lvl="0"/>
             <a:r>
-              <a:rPr lang="en-US" smtClean="0"/>
+              <a:rPr lang="en-US"/>
               <a:t>Click to edit Master text styles</a:t>
             </a:r>
           </a:p>
           <a:p>
             <a:pPr lvl="1"/>
             <a:r>
-              <a:rPr lang="en-US" smtClean="0"/>
+              <a:rPr lang="en-US"/>
               <a:t>Second level</a:t>
             </a:r>
           </a:p>
           <a:p>
             <a:pPr lvl="2"/>
             <a:r>
-              <a:rPr lang="en-US" smtClean="0"/>
+              <a:rPr lang="en-US"/>
               <a:t>Third level</a:t>
             </a:r>
           </a:p>
           <a:p>
             <a:pPr lvl="3"/>
             <a:r>
-              <a:rPr lang="en-US" smtClean="0"/>
+              <a:rPr lang="en-US"/>
               <a:t>Fourth level</a:t>
             </a:r>
           </a:p>
           <a:p>
             <a:pPr lvl="4"/>
             <a:r>
-              <a:rPr lang="en-US" smtClean="0"/>
+              <a:rPr lang="en-US"/>
               <a:t>Fifth level</a:t>
             </a:r>
-            <a:endParaRPr lang="en-US"/>
           </a:p>
         </p:txBody>
       </p:sp>
@@ -1772,7 +1773,7 @@
           <a:p>
             <a:fld id="{5BCAD085-E8A6-8845-BD4E-CB4CCA059FC4}" type="datetimeFigureOut">
               <a:rPr lang="en-US" smtClean="0"/>
-              <a:t>1/27/13</a:t>
+              <a:t>10/10/2026</a:t>
             </a:fld>
             <a:endParaRPr lang="en-US"/>
           </a:p>
@@ -1866,10 +1867,9 @@
           <a:lstStyle/>
           <a:p>
             <a:r>
-              <a:rPr lang="en-US" smtClean="0"/>
+              <a:rPr lang="en-US"/>
               <a:t>Click to edit Master title style</a:t>
             </a:r>
-            <a:endParaRPr lang="en-US"/>
           </a:p>
         </p:txBody>
       </p:sp>
@@ -1890,7 +1890,7 @@
           <a:p>
             <a:fld id="{5BCAD085-E8A6-8845-BD4E-CB4CCA059FC4}" type="datetimeFigureOut">
               <a:rPr lang="en-US" smtClean="0"/>
-              <a:t>1/27/13</a:t>
+              <a:t>10/10/2026</a:t>
             </a:fld>
             <a:endParaRPr lang="en-US"/>
           </a:p>
@@ -1985,7 +1985,7 @@
           <a:p>
             <a:fld id="{5BCAD085-E8A6-8845-BD4E-CB4CCA059FC4}" type="datetimeFigureOut">
               <a:rPr lang="en-US" smtClean="0"/>
-              <a:t>1/27/13</a:t>
+              <a:t>10/10/2026</a:t>
             </a:fld>
             <a:endParaRPr lang="en-US"/>
           </a:p>
@@ -2088,10 +2088,9 @@
           </a:lstStyle>
           <a:p>
             <a:r>
-              <a:rPr lang="en-US" smtClean="0"/>
+              <a:rPr lang="en-US"/>
               <a:t>Click to edit Master title style</a:t>
             </a:r>
-            <a:endParaRPr lang="en-US"/>
           </a:p>
         </p:txBody>
       </p:sp>
@@ -2145,38 +2144,37 @@
           <a:p>
             <a:pPr lvl="0"/>
             <a:r>
-              <a:rPr lang="en-US" smtClean="0"/>
+              <a:rPr lang="en-US"/>
               <a:t>Click to edit Master text styles</a:t>
             </a:r>
           </a:p>
           <a:p>
             <a:pPr lvl="1"/>
             <a:r>
-              <a:rPr lang="en-US" smtClean="0"/>
+              <a:rPr lang="en-US"/>
               <a:t>Second level</a:t>
             </a:r>
           </a:p>
           <a:p>
             <a:pPr lvl="2"/>
             <a:r>
-              <a:rPr lang="en-US" smtClean="0"/>
+              <a:rPr lang="en-US"/>
               <a:t>Third level</a:t>
             </a:r>
           </a:p>
           <a:p>
             <a:pPr lvl="3"/>
             <a:r>
-              <a:rPr lang="en-US" smtClean="0"/>
+              <a:rPr lang="en-US"/>
               <a:t>Fourth level</a:t>
             </a:r>
           </a:p>
           <a:p>
             <a:pPr lvl="4"/>
             <a:r>
-              <a:rPr lang="en-US" smtClean="0"/>
+              <a:rPr lang="en-US"/>
               <a:t>Fifth level</a:t>
             </a:r>
-            <a:endParaRPr lang="en-US"/>
           </a:p>
         </p:txBody>
       </p:sp>
@@ -2239,7 +2237,7 @@
           <a:p>
             <a:pPr lvl="0"/>
             <a:r>
-              <a:rPr lang="en-US" smtClean="0"/>
+              <a:rPr lang="en-US"/>
               <a:t>Click to edit Master text styles</a:t>
             </a:r>
           </a:p>
@@ -2262,7 +2260,7 @@
           <a:p>
             <a:fld id="{5BCAD085-E8A6-8845-BD4E-CB4CCA059FC4}" type="datetimeFigureOut">
               <a:rPr lang="en-US" smtClean="0"/>
-              <a:t>1/27/13</a:t>
+              <a:t>10/10/2026</a:t>
             </a:fld>
             <a:endParaRPr lang="en-US"/>
           </a:p>
@@ -2365,10 +2363,9 @@
           </a:lstStyle>
           <a:p>
             <a:r>
-              <a:rPr lang="en-US" smtClean="0"/>
+              <a:rPr lang="en-US"/>
               <a:t>Click to edit Master title style</a:t>
             </a:r>
-            <a:endParaRPr lang="en-US"/>
           </a:p>
         </p:txBody>
       </p:sp>
@@ -2492,7 +2489,7 @@
           <a:p>
             <a:pPr lvl="0"/>
             <a:r>
-              <a:rPr lang="en-US" smtClean="0"/>
+              <a:rPr lang="en-US"/>
               <a:t>Click to edit Master text styles</a:t>
             </a:r>
           </a:p>
@@ -2515,7 +2512,7 @@
           <a:p>
             <a:fld id="{5BCAD085-E8A6-8845-BD4E-CB4CCA059FC4}" type="datetimeFigureOut">
               <a:rPr lang="en-US" smtClean="0"/>
-              <a:t>1/27/13</a:t>
+              <a:t>10/10/2026</a:t>
             </a:fld>
             <a:endParaRPr lang="en-US"/>
           </a:p>
@@ -2624,10 +2621,9 @@
           <a:lstStyle/>
           <a:p>
             <a:r>
-              <a:rPr lang="en-US" smtClean="0"/>
+              <a:rPr lang="en-US"/>
               <a:t>Click to edit Master title style</a:t>
             </a:r>
-            <a:endParaRPr lang="en-US"/>
           </a:p>
         </p:txBody>
       </p:sp>
@@ -2658,38 +2654,37 @@
           <a:p>
             <a:pPr lvl="0"/>
             <a:r>
-              <a:rPr lang="en-US" smtClean="0"/>
+              <a:rPr lang="en-US"/>
               <a:t>Click to edit Master text styles</a:t>
             </a:r>
           </a:p>
           <a:p>
             <a:pPr lvl="1"/>
             <a:r>
-              <a:rPr lang="en-US" smtClean="0"/>
+              <a:rPr lang="en-US"/>
               <a:t>Second level</a:t>
             </a:r>
           </a:p>
           <a:p>
             <a:pPr lvl="2"/>
             <a:r>
-              <a:rPr lang="en-US" smtClean="0"/>
+              <a:rPr lang="en-US"/>
               <a:t>Third level</a:t>
             </a:r>
           </a:p>
           <a:p>
             <a:pPr lvl="3"/>
             <a:r>
-              <a:rPr lang="en-US" smtClean="0"/>
+              <a:rPr lang="en-US"/>
               <a:t>Fourth level</a:t>
             </a:r>
           </a:p>
           <a:p>
             <a:pPr lvl="4"/>
             <a:r>
-              <a:rPr lang="en-US" smtClean="0"/>
+              <a:rPr lang="en-US"/>
               <a:t>Fifth level</a:t>
             </a:r>
-            <a:endParaRPr lang="en-US"/>
           </a:p>
         </p:txBody>
       </p:sp>
@@ -2728,7 +2723,7 @@
           <a:p>
             <a:fld id="{5BCAD085-E8A6-8845-BD4E-CB4CCA059FC4}" type="datetimeFigureOut">
               <a:rPr lang="en-US" smtClean="0"/>
-              <a:t>1/27/13</a:t>
+              <a:t>10/10/2026</a:t>
             </a:fld>
             <a:endParaRPr lang="en-US"/>
           </a:p>
@@ -3087,7 +3082,7 @@
 </file>
 
 <file path=ppt/slides/slide1.xml><?xml version="1.0" encoding="utf-8"?>
-<p:sld xmlns:a="http://schemas.openxmlformats.org/drawingml/2006/main" xmlns:p="http://schemas.openxmlformats.org/presentationml/2006/main" xmlns:r="http://schemas.openxmlformats.org/officeDocument/2006/relationships">
+<p:sld xmlns:a="http://schemas.openxmlformats.org/drawingml/2006/main" xmlns:r="http://schemas.openxmlformats.org/officeDocument/2006/relationships" xmlns:p="http://schemas.openxmlformats.org/presentationml/2006/main">
   <p:cSld>
     <p:spTree>
       <p:nvGrpSpPr>
@@ -3095,7 +3090,14 @@
         <p:cNvGrpSpPr/>
         <p:nvPr/>
       </p:nvGrpSpPr>
-      <p:grpSpPr/>
+      <p:grpSpPr>
+        <a:xfrm>
+          <a:off x="0" y="0"/>
+          <a:ext cx="0" cy="0"/>
+          <a:chOff x="0" y="0"/>
+          <a:chExt cx="0" cy="0"/>
+        </a:xfrm>
+      </p:grpSpPr>
       <p:sp>
         <p:nvSpPr>
           <p:cNvPr id="2" name="Rectangle 1"/>
@@ -3136,6 +3138,7 @@
           <a:lstStyle/>
           <a:p>
             <a:pPr algn="ctr"/>
+            <a:endParaRPr/>
           </a:p>
         </p:txBody>
       </p:sp>
@@ -3179,6 +3182,7 @@
           <a:lstStyle/>
           <a:p>
             <a:pPr algn="ctr"/>
+            <a:endParaRPr/>
           </a:p>
         </p:txBody>
       </p:sp>
@@ -3210,7 +3214,6 @@
                 </a:solidFill>
                 <a:latin typeface="微软雅黑"/>
                 <a:ea typeface="微软雅黑"/>
-                <a:latin typeface="微软雅黑"/>
               </a:rPr>
               <a:t>普炳软件</a:t>
             </a:r>
@@ -3280,7 +3283,6 @@
                 </a:solidFill>
                 <a:latin typeface="微软雅黑"/>
                 <a:ea typeface="微软雅黑"/>
-                <a:latin typeface="微软雅黑"/>
               </a:rPr>
               <a:t>从靠人做表，到公司能力</a:t>
             </a:r>
@@ -3309,16 +3311,22 @@
           <a:p>
             <a:pPr algn="l"/>
             <a:r>
-              <a:rPr sz="4000" b="1">
+              <a:rPr sz="4000" b="1" dirty="0" err="1">
                 <a:solidFill>
                   <a:srgbClr val="FFFFFF"/>
                 </a:solidFill>
                 <a:latin typeface="微软雅黑"/>
                 <a:ea typeface="微软雅黑"/>
-                <a:latin typeface="微软雅黑"/>
               </a:rPr>
               <a:t>结构件自动核价平台</a:t>
             </a:r>
+            <a:endParaRPr sz="4000" b="1" dirty="0">
+              <a:solidFill>
+                <a:srgbClr val="FFFFFF"/>
+              </a:solidFill>
+              <a:latin typeface="微软雅黑"/>
+              <a:ea typeface="微软雅黑"/>
+            </a:endParaRPr>
           </a:p>
         </p:txBody>
       </p:sp>
@@ -3348,15 +3356,24 @@
               </a:lnSpc>
             </a:pPr>
             <a:r>
-              <a:rPr sz="2200" b="0">
+              <a:rPr sz="2200" b="0" dirty="0" err="1">
                 <a:solidFill>
                   <a:srgbClr val="C8C8C8"/>
                 </a:solidFill>
                 <a:latin typeface="微软雅黑"/>
                 <a:ea typeface="微软雅黑"/>
+              </a:rPr>
+              <a:t>管理人员是公司的建设者</a:t>
+            </a:r>
+            <a:r>
+              <a:rPr sz="2200" b="0" dirty="0">
+                <a:solidFill>
+                  <a:srgbClr val="C8C8C8"/>
+                </a:solidFill>
                 <a:latin typeface="微软雅黑"/>
-              </a:rPr>
-              <a:t>管理人员是公司的建设者。</a:t>
+                <a:ea typeface="微软雅黑"/>
+              </a:rPr>
+              <a:t>。</a:t>
             </a:r>
           </a:p>
           <a:p>
@@ -3366,16 +3383,134 @@
               </a:lnSpc>
             </a:pPr>
             <a:r>
-              <a:rPr sz="2200" b="0">
+              <a:rPr sz="2200" b="0" dirty="0" err="1">
                 <a:solidFill>
                   <a:srgbClr val="C8C8C8"/>
                 </a:solidFill>
                 <a:latin typeface="微软雅黑"/>
                 <a:ea typeface="微软雅黑"/>
+              </a:rPr>
+              <a:t>进出两头的钱，不能再交给几个人的表</a:t>
+            </a:r>
+            <a:r>
+              <a:rPr sz="2200" b="0" dirty="0">
+                <a:solidFill>
+                  <a:srgbClr val="C8C8C8"/>
+                </a:solidFill>
                 <a:latin typeface="微软雅黑"/>
-              </a:rPr>
-              <a:t>进出两头的钱，不能再交给几个人的表。</a:t>
-            </a:r>
+                <a:ea typeface="微软雅黑"/>
+              </a:rPr>
+              <a:t>。</a:t>
+            </a:r>
+            <a:endParaRPr lang="en-US" sz="2200" b="0" dirty="0">
+              <a:solidFill>
+                <a:srgbClr val="C8C8C8"/>
+              </a:solidFill>
+              <a:latin typeface="微软雅黑"/>
+              <a:ea typeface="微软雅黑"/>
+            </a:endParaRPr>
+          </a:p>
+          <a:p>
+            <a:pPr algn="l">
+              <a:lnSpc>
+                <a:spcPts val="3600"/>
+              </a:lnSpc>
+            </a:pPr>
+            <a:endParaRPr lang="en-US" sz="2200" dirty="0">
+              <a:solidFill>
+                <a:srgbClr val="C8C8C8"/>
+              </a:solidFill>
+              <a:latin typeface="微软雅黑"/>
+              <a:ea typeface="微软雅黑"/>
+            </a:endParaRPr>
+          </a:p>
+          <a:p>
+            <a:pPr>
+              <a:lnSpc>
+                <a:spcPts val="3600"/>
+              </a:lnSpc>
+            </a:pPr>
+            <a:r>
+              <a:rPr lang="en-US" altLang="zh-CN" dirty="0">
+                <a:solidFill>
+                  <a:srgbClr val="FF0000"/>
+                </a:solidFill>
+                <a:latin typeface="微软雅黑"/>
+                <a:ea typeface="微软雅黑"/>
+                <a:hlinkClick r:id="rId2">
+                  <a:extLst>
+                    <a:ext uri="{A12FA001-AC4F-418D-AE19-62706E023703}">
+                      <ahyp:hlinkClr xmlns:ahyp="http://schemas.microsoft.com/office/drawing/2018/hyperlinkcolor" val="tx"/>
+                    </a:ext>
+                  </a:extLst>
+                </a:hlinkClick>
+              </a:rPr>
+              <a:t>http://117.143.214.90:8000/</a:t>
+            </a:r>
+            <a:r>
+              <a:rPr lang="en-US" altLang="zh-CN" dirty="0">
+                <a:solidFill>
+                  <a:srgbClr val="C8C8C8"/>
+                </a:solidFill>
+                <a:latin typeface="微软雅黑"/>
+                <a:ea typeface="微软雅黑"/>
+              </a:rPr>
+              <a:t>  </a:t>
+            </a:r>
+            <a:r>
+              <a:rPr lang="zh-CN" altLang="en-US" dirty="0">
+                <a:solidFill>
+                  <a:srgbClr val="C8C8C8"/>
+                </a:solidFill>
+                <a:latin typeface="微软雅黑"/>
+                <a:ea typeface="微软雅黑"/>
+              </a:rPr>
+              <a:t>用户名：</a:t>
+            </a:r>
+            <a:r>
+              <a:rPr lang="en-US" altLang="zh-CN" dirty="0">
+                <a:solidFill>
+                  <a:srgbClr val="C8C8C8"/>
+                </a:solidFill>
+                <a:latin typeface="微软雅黑"/>
+                <a:ea typeface="微软雅黑"/>
+              </a:rPr>
+              <a:t>admin </a:t>
+            </a:r>
+            <a:r>
+              <a:rPr lang="zh-CN" altLang="en-US" dirty="0">
+                <a:solidFill>
+                  <a:srgbClr val="C8C8C8"/>
+                </a:solidFill>
+                <a:latin typeface="微软雅黑"/>
+                <a:ea typeface="微软雅黑"/>
+              </a:rPr>
+              <a:t>密码：</a:t>
+            </a:r>
+            <a:r>
+              <a:rPr lang="en-US" altLang="zh-CN" dirty="0">
+                <a:solidFill>
+                  <a:srgbClr val="C8C8C8"/>
+                </a:solidFill>
+                <a:latin typeface="微软雅黑"/>
+                <a:ea typeface="微软雅黑"/>
+              </a:rPr>
+              <a:t>admin123</a:t>
+            </a:r>
+          </a:p>
+          <a:p>
+            <a:pPr algn="l">
+              <a:lnSpc>
+                <a:spcPts val="3600"/>
+              </a:lnSpc>
+            </a:pPr>
+            <a:endParaRPr sz="2200" b="0" dirty="0">
+              <a:solidFill>
+                <a:srgbClr val="C8C8C8"/>
+              </a:solidFill>
+              <a:latin typeface="微软雅黑"/>
+              <a:ea typeface="微软雅黑"/>
+            </a:endParaRPr>
           </a:p>
         </p:txBody>
       </p:sp>
@@ -3407,7 +3542,6 @@
                 </a:solidFill>
                 <a:latin typeface="微软雅黑"/>
                 <a:ea typeface="微软雅黑"/>
-                <a:latin typeface="微软雅黑"/>
               </a:rPr>
               <a:t>普炳软件</a:t>
             </a:r>
@@ -3442,7 +3576,6 @@
                 </a:solidFill>
                 <a:latin typeface="Arial"/>
                 <a:ea typeface="微软雅黑"/>
-                <a:latin typeface="Arial"/>
               </a:rPr>
               <a:t>1 / 9</a:t>
             </a:r>
@@ -3458,7 +3591,7 @@
 </file>
 
 <file path=ppt/slides/slide2.xml><?xml version="1.0" encoding="utf-8"?>
-<p:sld xmlns:a="http://schemas.openxmlformats.org/drawingml/2006/main" xmlns:p="http://schemas.openxmlformats.org/presentationml/2006/main" xmlns:r="http://schemas.openxmlformats.org/officeDocument/2006/relationships">
+<p:sld xmlns:a="http://schemas.openxmlformats.org/drawingml/2006/main" xmlns:r="http://schemas.openxmlformats.org/officeDocument/2006/relationships" xmlns:p="http://schemas.openxmlformats.org/presentationml/2006/main">
   <p:cSld>
     <p:spTree>
       <p:nvGrpSpPr>
@@ -3466,7 +3599,14 @@
         <p:cNvGrpSpPr/>
         <p:nvPr/>
       </p:nvGrpSpPr>
-      <p:grpSpPr/>
+      <p:grpSpPr>
+        <a:xfrm>
+          <a:off x="0" y="0"/>
+          <a:ext cx="0" cy="0"/>
+          <a:chOff x="0" y="0"/>
+          <a:chExt cx="0" cy="0"/>
+        </a:xfrm>
+      </p:grpSpPr>
       <p:sp>
         <p:nvSpPr>
           <p:cNvPr id="2" name="Rectangle 1"/>
@@ -3507,6 +3647,7 @@
           <a:lstStyle/>
           <a:p>
             <a:pPr algn="ctr"/>
+            <a:endParaRPr/>
           </a:p>
         </p:txBody>
       </p:sp>
@@ -3550,6 +3691,7 @@
           <a:lstStyle/>
           <a:p>
             <a:pPr algn="ctr"/>
+            <a:endParaRPr/>
           </a:p>
         </p:txBody>
       </p:sp>
@@ -3593,6 +3735,7 @@
           <a:lstStyle/>
           <a:p>
             <a:pPr algn="ctr"/>
+            <a:endParaRPr/>
           </a:p>
         </p:txBody>
       </p:sp>
@@ -3624,7 +3767,6 @@
                 </a:solidFill>
                 <a:latin typeface="Arial"/>
                 <a:ea typeface="微软雅黑"/>
-                <a:latin typeface="Arial"/>
               </a:rPr>
               <a:t>01   THE COST</a:t>
             </a:r>
@@ -3659,7 +3801,6 @@
                 </a:solidFill>
                 <a:latin typeface="微软雅黑"/>
                 <a:ea typeface="微软雅黑"/>
-                <a:latin typeface="微软雅黑"/>
               </a:rPr>
               <a:t>现在核价绑在人身上，对账只能扯皮</a:t>
             </a:r>
@@ -3708,6 +3849,7 @@
           <a:lstStyle/>
           <a:p>
             <a:pPr algn="ctr"/>
+            <a:endParaRPr/>
           </a:p>
         </p:txBody>
       </p:sp>
@@ -3751,6 +3893,7 @@
           <a:lstStyle/>
           <a:p>
             <a:pPr algn="ctr"/>
+            <a:endParaRPr/>
           </a:p>
         </p:txBody>
       </p:sp>
@@ -3782,7 +3925,6 @@
                 </a:solidFill>
                 <a:latin typeface="微软雅黑"/>
                 <a:ea typeface="微软雅黑"/>
-                <a:latin typeface="微软雅黑"/>
               </a:rPr>
               <a:t>对人依赖</a:t>
             </a:r>
@@ -3821,7 +3963,6 @@
                 </a:solidFill>
                 <a:latin typeface="微软雅黑"/>
                 <a:ea typeface="微软雅黑"/>
-                <a:latin typeface="微软雅黑"/>
               </a:rPr>
               <a:t>会做表的人一走，</a:t>
             </a:r>
@@ -3839,7 +3980,6 @@
                 </a:solidFill>
                 <a:latin typeface="微软雅黑"/>
                 <a:ea typeface="微软雅黑"/>
-                <a:latin typeface="微软雅黑"/>
               </a:rPr>
               <a:t>账就停</a:t>
             </a:r>
@@ -3878,7 +4018,6 @@
                 </a:solidFill>
                 <a:latin typeface="微软雅黑"/>
                 <a:ea typeface="微软雅黑"/>
-                <a:latin typeface="微软雅黑"/>
               </a:rPr>
               <a:t>一事一议、总成、采购对象在骨干电脑里。</a:t>
             </a:r>
@@ -3896,7 +4035,6 @@
                 </a:solidFill>
                 <a:latin typeface="微软雅黑"/>
                 <a:ea typeface="微软雅黑"/>
-                <a:latin typeface="微软雅黑"/>
               </a:rPr>
               <a:t>人请假、离职，公司没有第二本账。</a:t>
             </a:r>
@@ -3945,6 +4083,7 @@
           <a:lstStyle/>
           <a:p>
             <a:pPr algn="ctr"/>
+            <a:endParaRPr/>
           </a:p>
         </p:txBody>
       </p:sp>
@@ -3988,6 +4127,7 @@
           <a:lstStyle/>
           <a:p>
             <a:pPr algn="ctr"/>
+            <a:endParaRPr/>
           </a:p>
         </p:txBody>
       </p:sp>
@@ -4019,7 +4159,6 @@
                 </a:solidFill>
                 <a:latin typeface="微软雅黑"/>
                 <a:ea typeface="微软雅黑"/>
-                <a:latin typeface="微软雅黑"/>
               </a:rPr>
               <a:t>扯皮</a:t>
             </a:r>
@@ -4058,7 +4197,6 @@
                 </a:solidFill>
                 <a:latin typeface="微软雅黑"/>
                 <a:ea typeface="微软雅黑"/>
-                <a:latin typeface="微软雅黑"/>
               </a:rPr>
               <a:t>各执一份 Excel，</a:t>
             </a:r>
@@ -4076,7 +4214,6 @@
                 </a:solidFill>
                 <a:latin typeface="微软雅黑"/>
                 <a:ea typeface="微软雅黑"/>
-                <a:latin typeface="微软雅黑"/>
               </a:rPr>
               <a:t>说不清哪一版</a:t>
             </a:r>
@@ -4115,7 +4252,6 @@
                 </a:solidFill>
                 <a:latin typeface="微软雅黑"/>
                 <a:ea typeface="微软雅黑"/>
-                <a:latin typeface="微软雅黑"/>
               </a:rPr>
               <a:t>对奇瑞、对二级商、对内部财务，各拿各的表。用过哪份文件、谁改的、当期哪版，对不上就只能吵。</a:t>
             </a:r>
@@ -4185,7 +4321,6 @@
                 </a:solidFill>
                 <a:latin typeface="微软雅黑"/>
                 <a:ea typeface="微软雅黑"/>
-                <a:latin typeface="微软雅黑"/>
               </a:rPr>
               <a:t>普炳软件  ·  核价平台</a:t>
             </a:r>
@@ -4220,7 +4355,6 @@
                 </a:solidFill>
                 <a:latin typeface="Arial"/>
                 <a:ea typeface="微软雅黑"/>
-                <a:latin typeface="Arial"/>
               </a:rPr>
               <a:t>2 / 9</a:t>
             </a:r>
@@ -4236,7 +4370,7 @@
 </file>
 
 <file path=ppt/slides/slide3.xml><?xml version="1.0" encoding="utf-8"?>
-<p:sld xmlns:a="http://schemas.openxmlformats.org/drawingml/2006/main" xmlns:p="http://schemas.openxmlformats.org/presentationml/2006/main" xmlns:r="http://schemas.openxmlformats.org/officeDocument/2006/relationships">
+<p:sld xmlns:a="http://schemas.openxmlformats.org/drawingml/2006/main" xmlns:r="http://schemas.openxmlformats.org/officeDocument/2006/relationships" xmlns:p="http://schemas.openxmlformats.org/presentationml/2006/main">
   <p:cSld>
     <p:spTree>
       <p:nvGrpSpPr>
@@ -4244,7 +4378,14 @@
         <p:cNvGrpSpPr/>
         <p:nvPr/>
       </p:nvGrpSpPr>
-      <p:grpSpPr/>
+      <p:grpSpPr>
+        <a:xfrm>
+          <a:off x="0" y="0"/>
+          <a:ext cx="0" cy="0"/>
+          <a:chOff x="0" y="0"/>
+          <a:chExt cx="0" cy="0"/>
+        </a:xfrm>
+      </p:grpSpPr>
       <p:sp>
         <p:nvSpPr>
           <p:cNvPr id="2" name="Rectangle 1"/>
@@ -4285,6 +4426,7 @@
           <a:lstStyle/>
           <a:p>
             <a:pPr algn="ctr"/>
+            <a:endParaRPr/>
           </a:p>
         </p:txBody>
       </p:sp>
@@ -4328,6 +4470,7 @@
           <a:lstStyle/>
           <a:p>
             <a:pPr algn="ctr"/>
+            <a:endParaRPr/>
           </a:p>
         </p:txBody>
       </p:sp>
@@ -4371,6 +4514,7 @@
           <a:lstStyle/>
           <a:p>
             <a:pPr algn="ctr"/>
+            <a:endParaRPr/>
           </a:p>
         </p:txBody>
       </p:sp>
@@ -4402,7 +4546,6 @@
                 </a:solidFill>
                 <a:latin typeface="Arial"/>
                 <a:ea typeface="微软雅黑"/>
-                <a:latin typeface="Arial"/>
               </a:rPr>
               <a:t>02   THE MONEY</a:t>
             </a:r>
@@ -4437,7 +4580,6 @@
                 </a:solidFill>
                 <a:latin typeface="微软雅黑"/>
                 <a:ea typeface="微软雅黑"/>
-                <a:latin typeface="微软雅黑"/>
               </a:rPr>
               <a:t>漏的是两本钱，吵的是设变这本糊涂账</a:t>
             </a:r>
@@ -4486,6 +4628,7 @@
           <a:lstStyle/>
           <a:p>
             <a:pPr algn="ctr"/>
+            <a:endParaRPr/>
           </a:p>
         </p:txBody>
       </p:sp>
@@ -4529,6 +4672,7 @@
           <a:lstStyle/>
           <a:p>
             <a:pPr algn="ctr"/>
+            <a:endParaRPr/>
           </a:p>
         </p:txBody>
       </p:sp>
@@ -4560,7 +4704,6 @@
                 </a:solidFill>
                 <a:latin typeface="微软雅黑"/>
                 <a:ea typeface="微软雅黑"/>
-                <a:latin typeface="微软雅黑"/>
               </a:rPr>
               <a:t>商务</a:t>
             </a:r>
@@ -4595,7 +4738,6 @@
                 </a:solidFill>
                 <a:latin typeface="微软雅黑"/>
                 <a:ea typeface="微软雅黑"/>
-                <a:latin typeface="微软雅黑"/>
               </a:rPr>
               <a:t>总成价</a:t>
             </a:r>
@@ -4634,7 +4776,6 @@
                 </a:solidFill>
                 <a:latin typeface="微软雅黑"/>
                 <a:ea typeface="微软雅黑"/>
-                <a:latin typeface="微软雅黑"/>
               </a:rPr>
               <a:t>开票给奇瑞的售价。谈价、开票、对账看这一本。</a:t>
             </a:r>
@@ -4652,7 +4793,6 @@
                 </a:solidFill>
                 <a:latin typeface="微软雅黑"/>
                 <a:ea typeface="微软雅黑"/>
-                <a:latin typeface="微软雅黑"/>
               </a:rPr>
               <a:t>算不准就是少收或超承诺。</a:t>
             </a:r>
@@ -4701,6 +4841,7 @@
           <a:lstStyle/>
           <a:p>
             <a:pPr algn="ctr"/>
+            <a:endParaRPr/>
           </a:p>
         </p:txBody>
       </p:sp>
@@ -4744,6 +4885,7 @@
           <a:lstStyle/>
           <a:p>
             <a:pPr algn="ctr"/>
+            <a:endParaRPr/>
           </a:p>
         </p:txBody>
       </p:sp>
@@ -4775,7 +4917,6 @@
                 </a:solidFill>
                 <a:latin typeface="微软雅黑"/>
                 <a:ea typeface="微软雅黑"/>
-                <a:latin typeface="微软雅黑"/>
               </a:rPr>
               <a:t>采购</a:t>
             </a:r>
@@ -4810,7 +4951,6 @@
                 </a:solidFill>
                 <a:latin typeface="微软雅黑"/>
                 <a:ea typeface="微软雅黑"/>
-                <a:latin typeface="微软雅黑"/>
               </a:rPr>
               <a:t>采购对象</a:t>
             </a:r>
@@ -4849,7 +4989,6 @@
                 </a:solidFill>
                 <a:latin typeface="微软雅黑"/>
                 <a:ea typeface="微软雅黑"/>
-                <a:latin typeface="微软雅黑"/>
               </a:rPr>
               <a:t>向二级商采购的价。该付多少、协议怎么签看这一本。</a:t>
             </a:r>
@@ -4867,7 +5006,6 @@
                 </a:solidFill>
                 <a:latin typeface="微软雅黑"/>
                 <a:ea typeface="微软雅黑"/>
-                <a:latin typeface="微软雅黑"/>
               </a:rPr>
               <a:t>算不准就是多付或付旧件。</a:t>
             </a:r>
@@ -4916,6 +5054,7 @@
           <a:lstStyle/>
           <a:p>
             <a:pPr algn="ctr"/>
+            <a:endParaRPr/>
           </a:p>
         </p:txBody>
       </p:sp>
@@ -4959,6 +5098,7 @@
           <a:lstStyle/>
           <a:p>
             <a:pPr algn="ctr"/>
+            <a:endParaRPr/>
           </a:p>
         </p:txBody>
       </p:sp>
@@ -4990,7 +5130,6 @@
                 </a:solidFill>
                 <a:latin typeface="微软雅黑"/>
                 <a:ea typeface="微软雅黑"/>
-                <a:latin typeface="微软雅黑"/>
               </a:rPr>
               <a:t>工程</a:t>
             </a:r>
@@ -5025,7 +5164,6 @@
                 </a:solidFill>
                 <a:latin typeface="微软雅黑"/>
                 <a:ea typeface="微软雅黑"/>
-                <a:latin typeface="微软雅黑"/>
               </a:rPr>
               <a:t>设变</a:t>
             </a:r>
@@ -5064,7 +5202,6 @@
                 </a:solidFill>
                 <a:latin typeface="微软雅黑"/>
                 <a:ea typeface="微软雅黑"/>
-                <a:latin typeface="微软雅黑"/>
               </a:rPr>
               <a:t>Excel 里改一层漏一层。</a:t>
             </a:r>
@@ -5082,7 +5219,6 @@
                 </a:solidFill>
                 <a:latin typeface="微软雅黑"/>
                 <a:ea typeface="微软雅黑"/>
-                <a:latin typeface="微软雅黑"/>
               </a:rPr>
               <a:t>商务可能还按旧总成开票，采购可能还按旧对象付款。</a:t>
             </a:r>
@@ -5152,7 +5288,6 @@
                 </a:solidFill>
                 <a:latin typeface="微软雅黑"/>
                 <a:ea typeface="微软雅黑"/>
-                <a:latin typeface="微软雅黑"/>
               </a:rPr>
               <a:t>普炳软件  ·  核价平台</a:t>
             </a:r>
@@ -5187,7 +5322,6 @@
                 </a:solidFill>
                 <a:latin typeface="Arial"/>
                 <a:ea typeface="微软雅黑"/>
-                <a:latin typeface="Arial"/>
               </a:rPr>
               <a:t>3 / 9</a:t>
             </a:r>
@@ -5203,7 +5337,7 @@
 </file>
 
 <file path=ppt/slides/slide4.xml><?xml version="1.0" encoding="utf-8"?>
-<p:sld xmlns:a="http://schemas.openxmlformats.org/drawingml/2006/main" xmlns:p="http://schemas.openxmlformats.org/presentationml/2006/main" xmlns:r="http://schemas.openxmlformats.org/officeDocument/2006/relationships">
+<p:sld xmlns:a="http://schemas.openxmlformats.org/drawingml/2006/main" xmlns:r="http://schemas.openxmlformats.org/officeDocument/2006/relationships" xmlns:p="http://schemas.openxmlformats.org/presentationml/2006/main">
   <p:cSld>
     <p:spTree>
       <p:nvGrpSpPr>
@@ -5211,7 +5345,14 @@
         <p:cNvGrpSpPr/>
         <p:nvPr/>
       </p:nvGrpSpPr>
-      <p:grpSpPr/>
+      <p:grpSpPr>
+        <a:xfrm>
+          <a:off x="0" y="0"/>
+          <a:ext cx="0" cy="0"/>
+          <a:chOff x="0" y="0"/>
+          <a:chExt cx="0" cy="0"/>
+        </a:xfrm>
+      </p:grpSpPr>
       <p:sp>
         <p:nvSpPr>
           <p:cNvPr id="2" name="Rectangle 1"/>
@@ -5252,6 +5393,7 @@
           <a:lstStyle/>
           <a:p>
             <a:pPr algn="ctr"/>
+            <a:endParaRPr/>
           </a:p>
         </p:txBody>
       </p:sp>
@@ -5295,6 +5437,7 @@
           <a:lstStyle/>
           <a:p>
             <a:pPr algn="ctr"/>
+            <a:endParaRPr/>
           </a:p>
         </p:txBody>
       </p:sp>
@@ -5338,6 +5481,7 @@
           <a:lstStyle/>
           <a:p>
             <a:pPr algn="ctr"/>
+            <a:endParaRPr/>
           </a:p>
         </p:txBody>
       </p:sp>
@@ -5369,7 +5513,6 @@
                 </a:solidFill>
                 <a:latin typeface="Arial"/>
                 <a:ea typeface="微软雅黑"/>
-                <a:latin typeface="Arial"/>
               </a:rPr>
               <a:t>03   THE CHOICE</a:t>
             </a:r>
@@ -5404,7 +5547,6 @@
                 </a:solidFill>
                 <a:latin typeface="微软雅黑"/>
                 <a:ea typeface="微软雅黑"/>
-                <a:latin typeface="微软雅黑"/>
               </a:rPr>
               <a:t>不做成公司能力，就是把公司的钱交给个人记忆</a:t>
             </a:r>
@@ -5453,6 +5595,7 @@
           <a:lstStyle/>
           <a:p>
             <a:pPr algn="ctr"/>
+            <a:endParaRPr/>
           </a:p>
         </p:txBody>
       </p:sp>
@@ -5496,6 +5639,7 @@
           <a:lstStyle/>
           <a:p>
             <a:pPr algn="ctr"/>
+            <a:endParaRPr/>
           </a:p>
         </p:txBody>
       </p:sp>
@@ -5527,7 +5671,6 @@
                 </a:solidFill>
                 <a:latin typeface="微软雅黑"/>
                 <a:ea typeface="微软雅黑"/>
-                <a:latin typeface="微软雅黑"/>
               </a:rPr>
               <a:t>继续 Excel</a:t>
             </a:r>
@@ -5566,7 +5709,6 @@
                 </a:solidFill>
                 <a:latin typeface="微软雅黑"/>
                 <a:ea typeface="微软雅黑"/>
-                <a:latin typeface="微软雅黑"/>
               </a:rPr>
               <a:t>进出两头的账</a:t>
             </a:r>
@@ -5584,7 +5726,6 @@
                 </a:solidFill>
                 <a:latin typeface="微软雅黑"/>
                 <a:ea typeface="微软雅黑"/>
-                <a:latin typeface="微软雅黑"/>
               </a:rPr>
               <a:t>在私人文件夹里</a:t>
             </a:r>
@@ -5623,7 +5764,6 @@
                 </a:solidFill>
                 <a:latin typeface="微软雅黑"/>
                 <a:ea typeface="微软雅黑"/>
-                <a:latin typeface="微软雅黑"/>
               </a:rPr>
               <a:t>人走、表散、设变对不上。开给奇瑞的价和付给二级商的价，对账时只能各执一词。</a:t>
             </a:r>
@@ -5641,7 +5781,6 @@
                 </a:solidFill>
                 <a:latin typeface="微软雅黑"/>
                 <a:ea typeface="微软雅黑"/>
-                <a:latin typeface="微软雅黑"/>
               </a:rPr>
               <a:t>管理人员说不过去。</a:t>
             </a:r>
@@ -5690,6 +5829,7 @@
           <a:lstStyle/>
           <a:p>
             <a:pPr algn="ctr"/>
+            <a:endParaRPr/>
           </a:p>
         </p:txBody>
       </p:sp>
@@ -5733,6 +5873,7 @@
           <a:lstStyle/>
           <a:p>
             <a:pPr algn="ctr"/>
+            <a:endParaRPr/>
           </a:p>
         </p:txBody>
       </p:sp>
@@ -5764,7 +5905,6 @@
                 </a:solidFill>
                 <a:latin typeface="微软雅黑"/>
                 <a:ea typeface="微软雅黑"/>
-                <a:latin typeface="微软雅黑"/>
               </a:rPr>
               <a:t>做成能力</a:t>
             </a:r>
@@ -5803,7 +5943,6 @@
                 </a:solidFill>
                 <a:latin typeface="微软雅黑"/>
                 <a:ea typeface="微软雅黑"/>
-                <a:latin typeface="微软雅黑"/>
               </a:rPr>
               <a:t>规则、依据、结果</a:t>
             </a:r>
@@ -5821,7 +5960,6 @@
                 </a:solidFill>
                 <a:latin typeface="微软雅黑"/>
                 <a:ea typeface="微软雅黑"/>
-                <a:latin typeface="微软雅黑"/>
               </a:rPr>
               <a:t>留在公司</a:t>
             </a:r>
@@ -5860,7 +5998,6 @@
                 </a:solidFill>
                 <a:latin typeface="微软雅黑"/>
                 <a:ea typeface="微软雅黑"/>
-                <a:latin typeface="微软雅黑"/>
               </a:rPr>
               <a:t>不是再做一张更大的表。是人可以交接，依据可以拿出，两本钱可以对上。</a:t>
             </a:r>
@@ -5878,7 +6015,6 @@
                 </a:solidFill>
                 <a:latin typeface="微软雅黑"/>
                 <a:ea typeface="微软雅黑"/>
-                <a:latin typeface="微软雅黑"/>
               </a:rPr>
               <a:t>这才是建设。</a:t>
             </a:r>
@@ -5948,7 +6084,6 @@
                 </a:solidFill>
                 <a:latin typeface="微软雅黑"/>
                 <a:ea typeface="微软雅黑"/>
-                <a:latin typeface="微软雅黑"/>
               </a:rPr>
               <a:t>普炳软件  ·  核价平台</a:t>
             </a:r>
@@ -5983,7 +6118,6 @@
                 </a:solidFill>
                 <a:latin typeface="Arial"/>
                 <a:ea typeface="微软雅黑"/>
-                <a:latin typeface="Arial"/>
               </a:rPr>
               <a:t>4 / 9</a:t>
             </a:r>
@@ -5999,7 +6133,7 @@
 </file>
 
 <file path=ppt/slides/slide5.xml><?xml version="1.0" encoding="utf-8"?>
-<p:sld xmlns:a="http://schemas.openxmlformats.org/drawingml/2006/main" xmlns:p="http://schemas.openxmlformats.org/presentationml/2006/main" xmlns:r="http://schemas.openxmlformats.org/officeDocument/2006/relationships">
+<p:sld xmlns:a="http://schemas.openxmlformats.org/drawingml/2006/main" xmlns:r="http://schemas.openxmlformats.org/officeDocument/2006/relationships" xmlns:p="http://schemas.openxmlformats.org/presentationml/2006/main">
   <p:cSld>
     <p:spTree>
       <p:nvGrpSpPr>
@@ -6007,7 +6141,14 @@
         <p:cNvGrpSpPr/>
         <p:nvPr/>
       </p:nvGrpSpPr>
-      <p:grpSpPr/>
+      <p:grpSpPr>
+        <a:xfrm>
+          <a:off x="0" y="0"/>
+          <a:ext cx="0" cy="0"/>
+          <a:chOff x="0" y="0"/>
+          <a:chExt cx="0" cy="0"/>
+        </a:xfrm>
+      </p:grpSpPr>
       <p:sp>
         <p:nvSpPr>
           <p:cNvPr id="2" name="Rectangle 1"/>
@@ -6048,6 +6189,7 @@
           <a:lstStyle/>
           <a:p>
             <a:pPr algn="ctr"/>
+            <a:endParaRPr/>
           </a:p>
         </p:txBody>
       </p:sp>
@@ -6091,6 +6233,7 @@
           <a:lstStyle/>
           <a:p>
             <a:pPr algn="ctr"/>
+            <a:endParaRPr/>
           </a:p>
         </p:txBody>
       </p:sp>
@@ -6134,6 +6277,7 @@
           <a:lstStyle/>
           <a:p>
             <a:pPr algn="ctr"/>
+            <a:endParaRPr/>
           </a:p>
         </p:txBody>
       </p:sp>
@@ -6165,7 +6309,6 @@
                 </a:solidFill>
                 <a:latin typeface="Arial"/>
                 <a:ea typeface="微软雅黑"/>
-                <a:latin typeface="Arial"/>
               </a:rPr>
               <a:t>04   FIRST VALUE</a:t>
             </a:r>
@@ -6200,7 +6343,6 @@
                 </a:solidFill>
                 <a:latin typeface="微软雅黑"/>
                 <a:ea typeface="微软雅黑"/>
-                <a:latin typeface="微软雅黑"/>
               </a:rPr>
               <a:t>第一价值：核价不再绑在几个人身上</a:t>
             </a:r>
@@ -6249,6 +6391,7 @@
           <a:lstStyle/>
           <a:p>
             <a:pPr algn="ctr"/>
+            <a:endParaRPr/>
           </a:p>
         </p:txBody>
       </p:sp>
@@ -6292,6 +6435,7 @@
           <a:lstStyle/>
           <a:p>
             <a:pPr algn="ctr"/>
+            <a:endParaRPr/>
           </a:p>
         </p:txBody>
       </p:sp>
@@ -6323,7 +6467,6 @@
                 </a:solidFill>
                 <a:latin typeface="微软雅黑"/>
                 <a:ea typeface="微软雅黑"/>
-                <a:latin typeface="微软雅黑"/>
               </a:rPr>
               <a:t>以前</a:t>
             </a:r>
@@ -6362,7 +6505,6 @@
                 </a:solidFill>
                 <a:latin typeface="微软雅黑"/>
                 <a:ea typeface="微软雅黑"/>
-                <a:latin typeface="微软雅黑"/>
               </a:rPr>
               <a:t>熟练人员</a:t>
             </a:r>
@@ -6380,7 +6522,6 @@
                 </a:solidFill>
                 <a:latin typeface="微软雅黑"/>
                 <a:ea typeface="微软雅黑"/>
-                <a:latin typeface="微软雅黑"/>
               </a:rPr>
               <a:t>好几天</a:t>
             </a:r>
@@ -6419,7 +6560,6 @@
                 </a:solidFill>
                 <a:latin typeface="微软雅黑"/>
                 <a:ea typeface="微软雅黑"/>
-                <a:latin typeface="微软雅黑"/>
               </a:rPr>
               <a:t>一事一议靠骨干手感。人一走，这件事就停。</a:t>
             </a:r>
@@ -6437,7 +6577,6 @@
                 </a:solidFill>
                 <a:latin typeface="微软雅黑"/>
                 <a:ea typeface="微软雅黑"/>
-                <a:latin typeface="微软雅黑"/>
               </a:rPr>
               <a:t>能力属于个人。</a:t>
             </a:r>
@@ -6486,6 +6625,7 @@
           <a:lstStyle/>
           <a:p>
             <a:pPr algn="ctr"/>
+            <a:endParaRPr/>
           </a:p>
         </p:txBody>
       </p:sp>
@@ -6529,6 +6669,7 @@
           <a:lstStyle/>
           <a:p>
             <a:pPr algn="ctr"/>
+            <a:endParaRPr/>
           </a:p>
         </p:txBody>
       </p:sp>
@@ -6560,7 +6701,6 @@
                 </a:solidFill>
                 <a:latin typeface="微软雅黑"/>
                 <a:ea typeface="微软雅黑"/>
-                <a:latin typeface="微软雅黑"/>
               </a:rPr>
               <a:t>现在</a:t>
             </a:r>
@@ -6599,7 +6739,6 @@
                 </a:solidFill>
                 <a:latin typeface="微软雅黑"/>
                 <a:ea typeface="微软雅黑"/>
-                <a:latin typeface="微软雅黑"/>
               </a:rPr>
               <a:t>上传依据</a:t>
             </a:r>
@@ -6617,7 +6756,6 @@
                 </a:solidFill>
                 <a:latin typeface="微软雅黑"/>
                 <a:ea typeface="微软雅黑"/>
-                <a:latin typeface="微软雅黑"/>
               </a:rPr>
               <a:t>约 20 秒</a:t>
             </a:r>
@@ -6656,7 +6794,6 @@
                 </a:solidFill>
                 <a:latin typeface="微软雅黑"/>
                 <a:ea typeface="微软雅黑"/>
-                <a:latin typeface="微软雅黑"/>
               </a:rPr>
               <a:t>规则在引擎里。人请假，总成账和采购账照样能出。能力属于公司。</a:t>
             </a:r>
@@ -6726,7 +6863,6 @@
                 </a:solidFill>
                 <a:latin typeface="微软雅黑"/>
                 <a:ea typeface="微软雅黑"/>
-                <a:latin typeface="微软雅黑"/>
               </a:rPr>
               <a:t>普炳软件  ·  核价平台</a:t>
             </a:r>
@@ -6761,7 +6897,6 @@
                 </a:solidFill>
                 <a:latin typeface="Arial"/>
                 <a:ea typeface="微软雅黑"/>
-                <a:latin typeface="Arial"/>
               </a:rPr>
               <a:t>5 / 9</a:t>
             </a:r>
@@ -6777,7 +6912,7 @@
 </file>
 
 <file path=ppt/slides/slide6.xml><?xml version="1.0" encoding="utf-8"?>
-<p:sld xmlns:a="http://schemas.openxmlformats.org/drawingml/2006/main" xmlns:p="http://schemas.openxmlformats.org/presentationml/2006/main" xmlns:r="http://schemas.openxmlformats.org/officeDocument/2006/relationships">
+<p:sld xmlns:a="http://schemas.openxmlformats.org/drawingml/2006/main" xmlns:r="http://schemas.openxmlformats.org/officeDocument/2006/relationships" xmlns:p="http://schemas.openxmlformats.org/presentationml/2006/main">
   <p:cSld>
     <p:spTree>
       <p:nvGrpSpPr>
@@ -6785,7 +6920,14 @@
         <p:cNvGrpSpPr/>
         <p:nvPr/>
       </p:nvGrpSpPr>
-      <p:grpSpPr/>
+      <p:grpSpPr>
+        <a:xfrm>
+          <a:off x="0" y="0"/>
+          <a:ext cx="0" cy="0"/>
+          <a:chOff x="0" y="0"/>
+          <a:chExt cx="0" cy="0"/>
+        </a:xfrm>
+      </p:grpSpPr>
       <p:sp>
         <p:nvSpPr>
           <p:cNvPr id="2" name="Rectangle 1"/>
@@ -6826,6 +6968,7 @@
           <a:lstStyle/>
           <a:p>
             <a:pPr algn="ctr"/>
+            <a:endParaRPr/>
           </a:p>
         </p:txBody>
       </p:sp>
@@ -6869,6 +7012,7 @@
           <a:lstStyle/>
           <a:p>
             <a:pPr algn="ctr"/>
+            <a:endParaRPr/>
           </a:p>
         </p:txBody>
       </p:sp>
@@ -6912,6 +7056,7 @@
           <a:lstStyle/>
           <a:p>
             <a:pPr algn="ctr"/>
+            <a:endParaRPr/>
           </a:p>
         </p:txBody>
       </p:sp>
@@ -6943,7 +7088,6 @@
                 </a:solidFill>
                 <a:latin typeface="Arial"/>
                 <a:ea typeface="微软雅黑"/>
-                <a:latin typeface="Arial"/>
               </a:rPr>
               <a:t>05   SECOND VALUE</a:t>
             </a:r>
@@ -6978,7 +7122,6 @@
                 </a:solidFill>
                 <a:latin typeface="微软雅黑"/>
                 <a:ea typeface="微软雅黑"/>
-                <a:latin typeface="微软雅黑"/>
               </a:rPr>
               <a:t>第二价值：依据能拿出，就不必再扯皮</a:t>
             </a:r>
@@ -7027,6 +7170,7 @@
           <a:lstStyle/>
           <a:p>
             <a:pPr algn="ctr"/>
+            <a:endParaRPr/>
           </a:p>
         </p:txBody>
       </p:sp>
@@ -7070,6 +7214,7 @@
           <a:lstStyle/>
           <a:p>
             <a:pPr algn="ctr"/>
+            <a:endParaRPr/>
           </a:p>
         </p:txBody>
       </p:sp>
@@ -7101,7 +7246,6 @@
                 </a:solidFill>
                 <a:latin typeface="微软雅黑"/>
                 <a:ea typeface="微软雅黑"/>
-                <a:latin typeface="微软雅黑"/>
               </a:rPr>
               <a:t>哪份文件</a:t>
             </a:r>
@@ -7140,7 +7284,6 @@
                 </a:solidFill>
                 <a:latin typeface="微软雅黑"/>
                 <a:ea typeface="微软雅黑"/>
-                <a:latin typeface="微软雅黑"/>
               </a:rPr>
               <a:t>当时用的 Excel 能找回，不是私人拷贝。</a:t>
             </a:r>
@@ -7189,6 +7332,7 @@
           <a:lstStyle/>
           <a:p>
             <a:pPr algn="ctr"/>
+            <a:endParaRPr/>
           </a:p>
         </p:txBody>
       </p:sp>
@@ -7232,6 +7376,7 @@
           <a:lstStyle/>
           <a:p>
             <a:pPr algn="ctr"/>
+            <a:endParaRPr/>
           </a:p>
         </p:txBody>
       </p:sp>
@@ -7263,7 +7408,6 @@
                 </a:solidFill>
                 <a:latin typeface="微软雅黑"/>
                 <a:ea typeface="微软雅黑"/>
-                <a:latin typeface="微软雅黑"/>
               </a:rPr>
               <a:t>谁操作的</a:t>
             </a:r>
@@ -7302,7 +7446,6 @@
                 </a:solidFill>
                 <a:latin typeface="微软雅黑"/>
                 <a:ea typeface="微软雅黑"/>
-                <a:latin typeface="微软雅黑"/>
               </a:rPr>
               <a:t>上传、计算、变更有日志。对账问记录。</a:t>
             </a:r>
@@ -7351,6 +7494,7 @@
           <a:lstStyle/>
           <a:p>
             <a:pPr algn="ctr"/>
+            <a:endParaRPr/>
           </a:p>
         </p:txBody>
       </p:sp>
@@ -7394,6 +7538,7 @@
           <a:lstStyle/>
           <a:p>
             <a:pPr algn="ctr"/>
+            <a:endParaRPr/>
           </a:p>
         </p:txBody>
       </p:sp>
@@ -7425,7 +7570,6 @@
                 </a:solidFill>
                 <a:latin typeface="微软雅黑"/>
                 <a:ea typeface="微软雅黑"/>
-                <a:latin typeface="微软雅黑"/>
               </a:rPr>
               <a:t>当期哪版</a:t>
             </a:r>
@@ -7464,7 +7608,6 @@
                 </a:solidFill>
                 <a:latin typeface="微软雅黑"/>
                 <a:ea typeface="微软雅黑"/>
-                <a:latin typeface="微软雅黑"/>
               </a:rPr>
               <a:t>钢价、BOM、工艺、设变按月对齐。</a:t>
             </a:r>
@@ -7513,6 +7656,7 @@
           <a:lstStyle/>
           <a:p>
             <a:pPr algn="ctr"/>
+            <a:endParaRPr/>
           </a:p>
         </p:txBody>
       </p:sp>
@@ -7556,6 +7700,7 @@
           <a:lstStyle/>
           <a:p>
             <a:pPr algn="ctr"/>
+            <a:endParaRPr/>
           </a:p>
         </p:txBody>
       </p:sp>
@@ -7587,7 +7732,6 @@
                 </a:solidFill>
                 <a:latin typeface="微软雅黑"/>
                 <a:ea typeface="微软雅黑"/>
-                <a:latin typeface="微软雅黑"/>
               </a:rPr>
               <a:t>同一套规则</a:t>
             </a:r>
@@ -7626,7 +7770,6 @@
                 </a:solidFill>
                 <a:latin typeface="微软雅黑"/>
                 <a:ea typeface="微软雅黑"/>
-                <a:latin typeface="微软雅黑"/>
               </a:rPr>
               <a:t>开给奇瑞和付给二级商，同一引擎。</a:t>
             </a:r>
@@ -7696,7 +7839,6 @@
                 </a:solidFill>
                 <a:latin typeface="微软雅黑"/>
                 <a:ea typeface="微软雅黑"/>
-                <a:latin typeface="微软雅黑"/>
               </a:rPr>
               <a:t>普炳软件  ·  核价平台</a:t>
             </a:r>
@@ -7731,7 +7873,6 @@
                 </a:solidFill>
                 <a:latin typeface="Arial"/>
                 <a:ea typeface="微软雅黑"/>
-                <a:latin typeface="Arial"/>
               </a:rPr>
               <a:t>6 / 9</a:t>
             </a:r>
@@ -7747,7 +7888,7 @@
 </file>
 
 <file path=ppt/slides/slide7.xml><?xml version="1.0" encoding="utf-8"?>
-<p:sld xmlns:a="http://schemas.openxmlformats.org/drawingml/2006/main" xmlns:p="http://schemas.openxmlformats.org/presentationml/2006/main" xmlns:r="http://schemas.openxmlformats.org/officeDocument/2006/relationships">
+<p:sld xmlns:a="http://schemas.openxmlformats.org/drawingml/2006/main" xmlns:r="http://schemas.openxmlformats.org/officeDocument/2006/relationships" xmlns:p="http://schemas.openxmlformats.org/presentationml/2006/main">
   <p:cSld>
     <p:spTree>
       <p:nvGrpSpPr>
@@ -7755,7 +7896,14 @@
         <p:cNvGrpSpPr/>
         <p:nvPr/>
       </p:nvGrpSpPr>
-      <p:grpSpPr/>
+      <p:grpSpPr>
+        <a:xfrm>
+          <a:off x="0" y="0"/>
+          <a:ext cx="0" cy="0"/>
+          <a:chOff x="0" y="0"/>
+          <a:chExt cx="0" cy="0"/>
+        </a:xfrm>
+      </p:grpSpPr>
       <p:sp>
         <p:nvSpPr>
           <p:cNvPr id="2" name="Rectangle 1"/>
@@ -7796,6 +7944,7 @@
           <a:lstStyle/>
           <a:p>
             <a:pPr algn="ctr"/>
+            <a:endParaRPr/>
           </a:p>
         </p:txBody>
       </p:sp>
@@ -7839,6 +7988,7 @@
           <a:lstStyle/>
           <a:p>
             <a:pPr algn="ctr"/>
+            <a:endParaRPr/>
           </a:p>
         </p:txBody>
       </p:sp>
@@ -7882,6 +8032,7 @@
           <a:lstStyle/>
           <a:p>
             <a:pPr algn="ctr"/>
+            <a:endParaRPr/>
           </a:p>
         </p:txBody>
       </p:sp>
@@ -7913,7 +8064,6 @@
                 </a:solidFill>
                 <a:latin typeface="Arial"/>
                 <a:ea typeface="微软雅黑"/>
-                <a:latin typeface="Arial"/>
               </a:rPr>
               <a:t>06   THE LEVER</a:t>
             </a:r>
@@ -7948,7 +8098,6 @@
                 </a:solidFill>
                 <a:latin typeface="微软雅黑"/>
                 <a:ea typeface="微软雅黑"/>
-                <a:latin typeface="微软雅黑"/>
               </a:rPr>
               <a:t>所以数字化、AI 落地，核价是最好的抓手</a:t>
             </a:r>
@@ -7983,7 +8132,6 @@
                 </a:solidFill>
                 <a:latin typeface="微软雅黑"/>
                 <a:ea typeface="微软雅黑"/>
-                <a:latin typeface="微软雅黑"/>
               </a:rPr>
               <a:t>建设不是再上一个聊天工具。是把最痛、最有规则、立刻碰到钱的事做成公司能力。</a:t>
             </a:r>
@@ -8032,6 +8180,7 @@
           <a:lstStyle/>
           <a:p>
             <a:pPr algn="ctr"/>
+            <a:endParaRPr/>
           </a:p>
         </p:txBody>
       </p:sp>
@@ -8075,6 +8224,7 @@
           <a:lstStyle/>
           <a:p>
             <a:pPr algn="ctr"/>
+            <a:endParaRPr/>
           </a:p>
         </p:txBody>
       </p:sp>
@@ -8106,7 +8256,6 @@
                 </a:solidFill>
                 <a:latin typeface="微软雅黑"/>
                 <a:ea typeface="微软雅黑"/>
-                <a:latin typeface="微软雅黑"/>
               </a:rPr>
               <a:t>有规则</a:t>
             </a:r>
@@ -8145,7 +8294,6 @@
                 </a:solidFill>
                 <a:latin typeface="微软雅黑"/>
                 <a:ea typeface="微软雅黑"/>
-                <a:latin typeface="微软雅黑"/>
               </a:rPr>
               <a:t>钢价政策、工艺、BOM、设变，本来就有企业口径。</a:t>
             </a:r>
@@ -8163,7 +8311,6 @@
                 </a:solidFill>
                 <a:latin typeface="微软雅黑"/>
                 <a:ea typeface="微软雅黑"/>
-                <a:latin typeface="微软雅黑"/>
               </a:rPr>
               <a:t>适合写成引擎，而不是口头 AI。</a:t>
             </a:r>
@@ -8212,6 +8359,7 @@
           <a:lstStyle/>
           <a:p>
             <a:pPr algn="ctr"/>
+            <a:endParaRPr/>
           </a:p>
         </p:txBody>
       </p:sp>
@@ -8255,6 +8403,7 @@
           <a:lstStyle/>
           <a:p>
             <a:pPr algn="ctr"/>
+            <a:endParaRPr/>
           </a:p>
         </p:txBody>
       </p:sp>
@@ -8286,7 +8435,6 @@
                 </a:solidFill>
                 <a:latin typeface="微软雅黑"/>
                 <a:ea typeface="微软雅黑"/>
-                <a:latin typeface="微软雅黑"/>
               </a:rPr>
               <a:t>有真账</a:t>
             </a:r>
@@ -8325,7 +8473,6 @@
                 </a:solidFill>
                 <a:latin typeface="微软雅黑"/>
                 <a:ea typeface="微软雅黑"/>
-                <a:latin typeface="微软雅黑"/>
               </a:rPr>
               <a:t>开给奇瑞的总成价、付给二级商的采购价，每月都要对。</a:t>
             </a:r>
@@ -8343,7 +8490,6 @@
                 </a:solidFill>
                 <a:latin typeface="微软雅黑"/>
                 <a:ea typeface="微软雅黑"/>
-                <a:latin typeface="微软雅黑"/>
               </a:rPr>
               <a:t>建设立刻碰到钱。</a:t>
             </a:r>
@@ -8392,6 +8538,7 @@
           <a:lstStyle/>
           <a:p>
             <a:pPr algn="ctr"/>
+            <a:endParaRPr/>
           </a:p>
         </p:txBody>
       </p:sp>
@@ -8435,6 +8582,7 @@
           <a:lstStyle/>
           <a:p>
             <a:pPr algn="ctr"/>
+            <a:endParaRPr/>
           </a:p>
         </p:txBody>
       </p:sp>
@@ -8466,7 +8614,6 @@
                 </a:solidFill>
                 <a:latin typeface="微软雅黑"/>
                 <a:ea typeface="微软雅黑"/>
-                <a:latin typeface="微软雅黑"/>
               </a:rPr>
               <a:t>能见效</a:t>
             </a:r>
@@ -8505,7 +8652,6 @@
                 </a:solidFill>
                 <a:latin typeface="微软雅黑"/>
                 <a:ea typeface="微软雅黑"/>
-                <a:latin typeface="微软雅黑"/>
               </a:rPr>
               <a:t>账能复算、人能交接、依据能拿出。</a:t>
             </a:r>
@@ -8523,7 +8669,6 @@
                 </a:solidFill>
                 <a:latin typeface="微软雅黑"/>
                 <a:ea typeface="微软雅黑"/>
-                <a:latin typeface="微软雅黑"/>
               </a:rPr>
               <a:t>AI 问的是这本真账，不是编一个价。</a:t>
             </a:r>
@@ -8593,7 +8738,6 @@
                 </a:solidFill>
                 <a:latin typeface="微软雅黑"/>
                 <a:ea typeface="微软雅黑"/>
-                <a:latin typeface="微软雅黑"/>
               </a:rPr>
               <a:t>普炳软件  ·  核价平台</a:t>
             </a:r>
@@ -8628,7 +8772,6 @@
                 </a:solidFill>
                 <a:latin typeface="Arial"/>
                 <a:ea typeface="微软雅黑"/>
-                <a:latin typeface="Arial"/>
               </a:rPr>
               <a:t>7 / 9</a:t>
             </a:r>
@@ -8644,7 +8787,7 @@
 </file>
 
 <file path=ppt/slides/slide8.xml><?xml version="1.0" encoding="utf-8"?>
-<p:sld xmlns:a="http://schemas.openxmlformats.org/drawingml/2006/main" xmlns:p="http://schemas.openxmlformats.org/presentationml/2006/main" xmlns:r="http://schemas.openxmlformats.org/officeDocument/2006/relationships">
+<p:sld xmlns:a="http://schemas.openxmlformats.org/drawingml/2006/main" xmlns:r="http://schemas.openxmlformats.org/officeDocument/2006/relationships" xmlns:p="http://schemas.openxmlformats.org/presentationml/2006/main">
   <p:cSld>
     <p:spTree>
       <p:nvGrpSpPr>
@@ -8652,7 +8795,14 @@
         <p:cNvGrpSpPr/>
         <p:nvPr/>
       </p:nvGrpSpPr>
-      <p:grpSpPr/>
+      <p:grpSpPr>
+        <a:xfrm>
+          <a:off x="0" y="0"/>
+          <a:ext cx="0" cy="0"/>
+          <a:chOff x="0" y="0"/>
+          <a:chExt cx="0" cy="0"/>
+        </a:xfrm>
+      </p:grpSpPr>
       <p:sp>
         <p:nvSpPr>
           <p:cNvPr id="2" name="Rectangle 1"/>
@@ -8693,6 +8843,7 @@
           <a:lstStyle/>
           <a:p>
             <a:pPr algn="ctr"/>
+            <a:endParaRPr/>
           </a:p>
         </p:txBody>
       </p:sp>
@@ -8736,6 +8887,7 @@
           <a:lstStyle/>
           <a:p>
             <a:pPr algn="ctr"/>
+            <a:endParaRPr/>
           </a:p>
         </p:txBody>
       </p:sp>
@@ -8779,6 +8931,7 @@
           <a:lstStyle/>
           <a:p>
             <a:pPr algn="ctr"/>
+            <a:endParaRPr/>
           </a:p>
         </p:txBody>
       </p:sp>
@@ -8810,7 +8963,6 @@
                 </a:solidFill>
                 <a:latin typeface="Arial"/>
                 <a:ea typeface="微软雅黑"/>
-                <a:latin typeface="Arial"/>
               </a:rPr>
               <a:t>07   THE PLATFORM</a:t>
             </a:r>
@@ -8845,7 +8997,6 @@
                 </a:solidFill>
                 <a:latin typeface="微软雅黑"/>
                 <a:ea typeface="微软雅黑"/>
-                <a:latin typeface="微软雅黑"/>
               </a:rPr>
               <a:t>平台管这些依据，算出那两本账</a:t>
             </a:r>
@@ -8880,7 +9031,6 @@
                 </a:solidFill>
                 <a:latin typeface="微软雅黑"/>
                 <a:ea typeface="微软雅黑"/>
-                <a:latin typeface="微软雅黑"/>
               </a:rPr>
               <a:t>细则见面看。这一页只回答：它究竟管什么。</a:t>
             </a:r>
@@ -8929,6 +9079,7 @@
           <a:lstStyle/>
           <a:p>
             <a:pPr algn="ctr"/>
+            <a:endParaRPr/>
           </a:p>
         </p:txBody>
       </p:sp>
@@ -8972,6 +9123,7 @@
           <a:lstStyle/>
           <a:p>
             <a:pPr algn="ctr"/>
+            <a:endParaRPr/>
           </a:p>
         </p:txBody>
       </p:sp>
@@ -9003,7 +9155,6 @@
                 </a:solidFill>
                 <a:latin typeface="Arial"/>
                 <a:ea typeface="微软雅黑"/>
-                <a:latin typeface="Arial"/>
               </a:rPr>
               <a:t>Policy</a:t>
             </a:r>
@@ -9038,7 +9189,6 @@
                 </a:solidFill>
                 <a:latin typeface="微软雅黑"/>
                 <a:ea typeface="微软雅黑"/>
-                <a:latin typeface="微软雅黑"/>
               </a:rPr>
               <a:t>钢价一事一议</a:t>
             </a:r>
@@ -9087,6 +9237,7 @@
           <a:lstStyle/>
           <a:p>
             <a:pPr algn="ctr"/>
+            <a:endParaRPr/>
           </a:p>
         </p:txBody>
       </p:sp>
@@ -9130,6 +9281,7 @@
           <a:lstStyle/>
           <a:p>
             <a:pPr algn="ctr"/>
+            <a:endParaRPr/>
           </a:p>
         </p:txBody>
       </p:sp>
@@ -9161,7 +9313,6 @@
                 </a:solidFill>
                 <a:latin typeface="Arial"/>
                 <a:ea typeface="微软雅黑"/>
-                <a:latin typeface="Arial"/>
               </a:rPr>
               <a:t>BOM</a:t>
             </a:r>
@@ -9196,7 +9347,6 @@
                 </a:solidFill>
                 <a:latin typeface="微软雅黑"/>
                 <a:ea typeface="微软雅黑"/>
-                <a:latin typeface="微软雅黑"/>
               </a:rPr>
               <a:t>结构与外购</a:t>
             </a:r>
@@ -9245,6 +9395,7 @@
           <a:lstStyle/>
           <a:p>
             <a:pPr algn="ctr"/>
+            <a:endParaRPr/>
           </a:p>
         </p:txBody>
       </p:sp>
@@ -9288,6 +9439,7 @@
           <a:lstStyle/>
           <a:p>
             <a:pPr algn="ctr"/>
+            <a:endParaRPr/>
           </a:p>
         </p:txBody>
       </p:sp>
@@ -9319,7 +9471,6 @@
                 </a:solidFill>
                 <a:latin typeface="Arial"/>
                 <a:ea typeface="微软雅黑"/>
-                <a:latin typeface="Arial"/>
               </a:rPr>
               <a:t>Process</a:t>
             </a:r>
@@ -9354,7 +9505,6 @@
                 </a:solidFill>
                 <a:latin typeface="微软雅黑"/>
                 <a:ea typeface="微软雅黑"/>
-                <a:latin typeface="微软雅黑"/>
               </a:rPr>
               <a:t>工艺与模具</a:t>
             </a:r>
@@ -9403,6 +9553,7 @@
           <a:lstStyle/>
           <a:p>
             <a:pPr algn="ctr"/>
+            <a:endParaRPr/>
           </a:p>
         </p:txBody>
       </p:sp>
@@ -9446,6 +9597,7 @@
           <a:lstStyle/>
           <a:p>
             <a:pPr algn="ctr"/>
+            <a:endParaRPr/>
           </a:p>
         </p:txBody>
       </p:sp>
@@ -9477,7 +9629,6 @@
                 </a:solidFill>
                 <a:latin typeface="Arial"/>
                 <a:ea typeface="微软雅黑"/>
-                <a:latin typeface="Arial"/>
               </a:rPr>
               <a:t>Change</a:t>
             </a:r>
@@ -9512,7 +9663,6 @@
                 </a:solidFill>
                 <a:latin typeface="微软雅黑"/>
                 <a:ea typeface="微软雅黑"/>
-                <a:latin typeface="微软雅黑"/>
               </a:rPr>
               <a:t>工程变更</a:t>
             </a:r>
@@ -9561,6 +9711,7 @@
           <a:lstStyle/>
           <a:p>
             <a:pPr algn="ctr"/>
+            <a:endParaRPr/>
           </a:p>
         </p:txBody>
       </p:sp>
@@ -9604,6 +9755,7 @@
           <a:lstStyle/>
           <a:p>
             <a:pPr algn="ctr"/>
+            <a:endParaRPr/>
           </a:p>
         </p:txBody>
       </p:sp>
@@ -9635,7 +9787,6 @@
                 </a:solidFill>
                 <a:latin typeface="Arial"/>
                 <a:ea typeface="微软雅黑"/>
-                <a:latin typeface="Arial"/>
               </a:rPr>
               <a:t>Costing</a:t>
             </a:r>
@@ -9670,7 +9821,6 @@
                 </a:solidFill>
                 <a:latin typeface="微软雅黑"/>
                 <a:ea typeface="微软雅黑"/>
-                <a:latin typeface="微软雅黑"/>
               </a:rPr>
               <a:t>件价与总成</a:t>
             </a:r>
@@ -9719,6 +9869,7 @@
           <a:lstStyle/>
           <a:p>
             <a:pPr algn="ctr"/>
+            <a:endParaRPr/>
           </a:p>
         </p:txBody>
       </p:sp>
@@ -9762,6 +9913,7 @@
           <a:lstStyle/>
           <a:p>
             <a:pPr algn="ctr"/>
+            <a:endParaRPr/>
           </a:p>
         </p:txBody>
       </p:sp>
@@ -9793,7 +9945,6 @@
                 </a:solidFill>
                 <a:latin typeface="Arial"/>
                 <a:ea typeface="微软雅黑"/>
-                <a:latin typeface="Arial"/>
               </a:rPr>
               <a:t>Contract</a:t>
             </a:r>
@@ -9828,7 +9979,6 @@
                 </a:solidFill>
                 <a:latin typeface="微软雅黑"/>
                 <a:ea typeface="微软雅黑"/>
-                <a:latin typeface="微软雅黑"/>
               </a:rPr>
               <a:t>采购协议</a:t>
             </a:r>
@@ -9898,7 +10048,6 @@
                 </a:solidFill>
                 <a:latin typeface="微软雅黑"/>
                 <a:ea typeface="微软雅黑"/>
-                <a:latin typeface="微软雅黑"/>
               </a:rPr>
               <a:t>普炳软件  ·  核价平台</a:t>
             </a:r>
@@ -9933,7 +10082,6 @@
                 </a:solidFill>
                 <a:latin typeface="Arial"/>
                 <a:ea typeface="微软雅黑"/>
-                <a:latin typeface="Arial"/>
               </a:rPr>
               <a:t>8 / 9</a:t>
             </a:r>
@@ -9949,7 +10097,7 @@
 </file>
 
 <file path=ppt/slides/slide9.xml><?xml version="1.0" encoding="utf-8"?>
-<p:sld xmlns:a="http://schemas.openxmlformats.org/drawingml/2006/main" xmlns:p="http://schemas.openxmlformats.org/presentationml/2006/main" xmlns:r="http://schemas.openxmlformats.org/officeDocument/2006/relationships">
+<p:sld xmlns:a="http://schemas.openxmlformats.org/drawingml/2006/main" xmlns:r="http://schemas.openxmlformats.org/officeDocument/2006/relationships" xmlns:p="http://schemas.openxmlformats.org/presentationml/2006/main">
   <p:cSld>
     <p:spTree>
       <p:nvGrpSpPr>
@@ -9957,7 +10105,14 @@
         <p:cNvGrpSpPr/>
         <p:nvPr/>
       </p:nvGrpSpPr>
-      <p:grpSpPr/>
+      <p:grpSpPr>
+        <a:xfrm>
+          <a:off x="0" y="0"/>
+          <a:ext cx="0" cy="0"/>
+          <a:chOff x="0" y="0"/>
+          <a:chExt cx="0" cy="0"/>
+        </a:xfrm>
+      </p:grpSpPr>
       <p:sp>
         <p:nvSpPr>
           <p:cNvPr id="2" name="Rectangle 1"/>
@@ -9998,6 +10153,7 @@
           <a:lstStyle/>
           <a:p>
             <a:pPr algn="ctr"/>
+            <a:endParaRPr/>
           </a:p>
         </p:txBody>
       </p:sp>
@@ -10041,6 +10197,7 @@
           <a:lstStyle/>
           <a:p>
             <a:pPr algn="ctr"/>
+            <a:endParaRPr/>
           </a:p>
         </p:txBody>
       </p:sp>
@@ -10107,7 +10264,6 @@
                 </a:solidFill>
                 <a:latin typeface="Arial"/>
                 <a:ea typeface="微软雅黑"/>
-                <a:latin typeface="Arial"/>
               </a:rPr>
               <a:t>COME SEE</a:t>
             </a:r>
@@ -10142,7 +10298,6 @@
                 </a:solidFill>
                 <a:latin typeface="微软雅黑"/>
                 <a:ea typeface="微软雅黑"/>
-                <a:latin typeface="微软雅黑"/>
               </a:rPr>
               <a:t>请来看三件事。</a:t>
             </a:r>
@@ -10177,7 +10332,6 @@
                 </a:solidFill>
                 <a:latin typeface="Arial"/>
                 <a:ea typeface="微软雅黑"/>
-                <a:latin typeface="Arial"/>
               </a:rPr>
               <a:t>01</a:t>
             </a:r>
@@ -10212,7 +10366,6 @@
                 </a:solidFill>
                 <a:latin typeface="微软雅黑"/>
                 <a:ea typeface="微软雅黑"/>
-                <a:latin typeface="微软雅黑"/>
               </a:rPr>
               <a:t>人走了，账还在不在。</a:t>
             </a:r>
@@ -10247,7 +10400,6 @@
                 </a:solidFill>
                 <a:latin typeface="Arial"/>
                 <a:ea typeface="微软雅黑"/>
-                <a:latin typeface="Arial"/>
               </a:rPr>
               <a:t>02</a:t>
             </a:r>
@@ -10282,7 +10434,6 @@
                 </a:solidFill>
                 <a:latin typeface="微软雅黑"/>
                 <a:ea typeface="微软雅黑"/>
-                <a:latin typeface="微软雅黑"/>
               </a:rPr>
               <a:t>依据能不能当场拿出。</a:t>
             </a:r>
@@ -10317,7 +10468,6 @@
                 </a:solidFill>
                 <a:latin typeface="Arial"/>
                 <a:ea typeface="微软雅黑"/>
-                <a:latin typeface="Arial"/>
               </a:rPr>
               <a:t>03</a:t>
             </a:r>
@@ -10352,7 +10502,6 @@
                 </a:solidFill>
                 <a:latin typeface="微软雅黑"/>
                 <a:ea typeface="微软雅黑"/>
-                <a:latin typeface="微软雅黑"/>
               </a:rPr>
               <a:t>约 20 秒，两本账能不能出清。</a:t>
             </a:r>
@@ -10387,7 +10536,6 @@
                 </a:solidFill>
                 <a:latin typeface="微软雅黑"/>
                 <a:ea typeface="微软雅黑"/>
-                <a:latin typeface="微软雅黑"/>
               </a:rPr>
               <a:t>先把核价做成公司能力。数字化建设和 AI 落地，就有了抓手。</a:t>
             </a:r>
@@ -10422,7 +10570,6 @@
                 </a:solidFill>
                 <a:latin typeface="微软雅黑"/>
                 <a:ea typeface="微软雅黑"/>
-                <a:latin typeface="微软雅黑"/>
               </a:rPr>
               <a:t>普炳软件</a:t>
             </a:r>
@@ -10457,7 +10604,6 @@
                 </a:solidFill>
                 <a:latin typeface="Arial"/>
                 <a:ea typeface="微软雅黑"/>
-                <a:latin typeface="Arial"/>
               </a:rPr>
               <a:t>9 / 9</a:t>
             </a:r>

--- a/docs/结构件自动核价平台-简介.pptx
+++ b/docs/结构件自动核价平台-简介.pptx
@@ -5,17 +5,17 @@
     <p:sldMasterId id="2147483648" r:id="rId1"/>
   </p:sldMasterIdLst>
   <p:sldIdLst>
-    <p:sldId id="256" r:id="rId2"/>
-    <p:sldId id="257" r:id="rId3"/>
-    <p:sldId id="258" r:id="rId4"/>
-    <p:sldId id="259" r:id="rId5"/>
-    <p:sldId id="260" r:id="rId6"/>
-    <p:sldId id="261" r:id="rId7"/>
-    <p:sldId id="262" r:id="rId8"/>
-    <p:sldId id="263" r:id="rId9"/>
-    <p:sldId id="264" r:id="rId10"/>
+    <p:sldId id="256" r:id="rId7"/>
+    <p:sldId id="257" r:id="rId8"/>
+    <p:sldId id="258" r:id="rId9"/>
+    <p:sldId id="259" r:id="rId10"/>
+    <p:sldId id="260" r:id="rId11"/>
+    <p:sldId id="261" r:id="rId12"/>
+    <p:sldId id="262" r:id="rId13"/>
+    <p:sldId id="263" r:id="rId14"/>
+    <p:sldId id="264" r:id="rId15"/>
   </p:sldIdLst>
-  <p:sldSz cx="12192000" cy="6858000"/>
+  <p:sldSz cx="12191695" cy="6858000" type="screen4x3"/>
   <p:notesSz cx="6858000" cy="9144000"/>
   <p:defaultTextStyle>
     <a:defPPr>
@@ -112,22 +112,6 @@
       </a:defRPr>
     </a:lvl9pPr>
   </p:defaultTextStyle>
-  <p:extLst>
-    <p:ext uri="{EFAFB233-063F-42B5-8137-9DF3F51BA10A}">
-      <p15:sldGuideLst xmlns:p15="http://schemas.microsoft.com/office/powerpoint/2012/main">
-        <p15:guide id="1" orient="horz" pos="2160">
-          <p15:clr>
-            <a:srgbClr val="A4A3A4"/>
-          </p15:clr>
-        </p15:guide>
-        <p15:guide id="2" pos="2880">
-          <p15:clr>
-            <a:srgbClr val="A4A3A4"/>
-          </p15:clr>
-        </p15:guide>
-      </p15:sldGuideLst>
-    </p:ext>
-  </p:extLst>
 </p:presentation>
 </file>
 
@@ -169,9 +153,10 @@
           <a:lstStyle/>
           <a:p>
             <a:r>
-              <a:rPr lang="en-US"/>
+              <a:rPr lang="en-US" smtClean="0"/>
               <a:t>Click to edit Master title style</a:t>
             </a:r>
+            <a:endParaRPr lang="en-US"/>
           </a:p>
         </p:txBody>
       </p:sp>
@@ -287,9 +272,10 @@
           </a:lstStyle>
           <a:p>
             <a:r>
-              <a:rPr lang="en-US"/>
+              <a:rPr lang="en-US" smtClean="0"/>
               <a:t>Click to edit Master subtitle style</a:t>
             </a:r>
+            <a:endParaRPr lang="en-US"/>
           </a:p>
         </p:txBody>
       </p:sp>
@@ -310,7 +296,7 @@
           <a:p>
             <a:fld id="{5BCAD085-E8A6-8845-BD4E-CB4CCA059FC4}" type="datetimeFigureOut">
               <a:rPr lang="en-US" smtClean="0"/>
-              <a:t>10/10/2026</a:t>
+              <a:t>1/27/13</a:t>
             </a:fld>
             <a:endParaRPr lang="en-US"/>
           </a:p>
@@ -404,9 +390,10 @@
           <a:lstStyle/>
           <a:p>
             <a:r>
-              <a:rPr lang="en-US"/>
+              <a:rPr lang="en-US" smtClean="0"/>
               <a:t>Click to edit Master title style</a:t>
             </a:r>
+            <a:endParaRPr lang="en-US"/>
           </a:p>
         </p:txBody>
       </p:sp>
@@ -427,37 +414,38 @@
           <a:p>
             <a:pPr lvl="0"/>
             <a:r>
-              <a:rPr lang="en-US"/>
+              <a:rPr lang="en-US" smtClean="0"/>
               <a:t>Click to edit Master text styles</a:t>
             </a:r>
           </a:p>
           <a:p>
             <a:pPr lvl="1"/>
             <a:r>
-              <a:rPr lang="en-US"/>
+              <a:rPr lang="en-US" smtClean="0"/>
               <a:t>Second level</a:t>
             </a:r>
           </a:p>
           <a:p>
             <a:pPr lvl="2"/>
             <a:r>
-              <a:rPr lang="en-US"/>
+              <a:rPr lang="en-US" smtClean="0"/>
               <a:t>Third level</a:t>
             </a:r>
           </a:p>
           <a:p>
             <a:pPr lvl="3"/>
             <a:r>
-              <a:rPr lang="en-US"/>
+              <a:rPr lang="en-US" smtClean="0"/>
               <a:t>Fourth level</a:t>
             </a:r>
           </a:p>
           <a:p>
             <a:pPr lvl="4"/>
             <a:r>
-              <a:rPr lang="en-US"/>
+              <a:rPr lang="en-US" smtClean="0"/>
               <a:t>Fifth level</a:t>
             </a:r>
+            <a:endParaRPr lang="en-US"/>
           </a:p>
         </p:txBody>
       </p:sp>
@@ -478,7 +466,7 @@
           <a:p>
             <a:fld id="{5BCAD085-E8A6-8845-BD4E-CB4CCA059FC4}" type="datetimeFigureOut">
               <a:rPr lang="en-US" smtClean="0"/>
-              <a:t>10/10/2026</a:t>
+              <a:t>1/27/13</a:t>
             </a:fld>
             <a:endParaRPr lang="en-US"/>
           </a:p>
@@ -577,9 +565,10 @@
           <a:lstStyle/>
           <a:p>
             <a:r>
-              <a:rPr lang="en-US"/>
+              <a:rPr lang="en-US" smtClean="0"/>
               <a:t>Click to edit Master title style</a:t>
             </a:r>
+            <a:endParaRPr lang="en-US"/>
           </a:p>
         </p:txBody>
       </p:sp>
@@ -605,37 +594,38 @@
           <a:p>
             <a:pPr lvl="0"/>
             <a:r>
-              <a:rPr lang="en-US"/>
+              <a:rPr lang="en-US" smtClean="0"/>
               <a:t>Click to edit Master text styles</a:t>
             </a:r>
           </a:p>
           <a:p>
             <a:pPr lvl="1"/>
             <a:r>
-              <a:rPr lang="en-US"/>
+              <a:rPr lang="en-US" smtClean="0"/>
               <a:t>Second level</a:t>
             </a:r>
           </a:p>
           <a:p>
             <a:pPr lvl="2"/>
             <a:r>
-              <a:rPr lang="en-US"/>
+              <a:rPr lang="en-US" smtClean="0"/>
               <a:t>Third level</a:t>
             </a:r>
           </a:p>
           <a:p>
             <a:pPr lvl="3"/>
             <a:r>
-              <a:rPr lang="en-US"/>
+              <a:rPr lang="en-US" smtClean="0"/>
               <a:t>Fourth level</a:t>
             </a:r>
           </a:p>
           <a:p>
             <a:pPr lvl="4"/>
             <a:r>
-              <a:rPr lang="en-US"/>
+              <a:rPr lang="en-US" smtClean="0"/>
               <a:t>Fifth level</a:t>
             </a:r>
+            <a:endParaRPr lang="en-US"/>
           </a:p>
         </p:txBody>
       </p:sp>
@@ -656,7 +646,7 @@
           <a:p>
             <a:fld id="{5BCAD085-E8A6-8845-BD4E-CB4CCA059FC4}" type="datetimeFigureOut">
               <a:rPr lang="en-US" smtClean="0"/>
-              <a:t>10/10/2026</a:t>
+              <a:t>1/27/13</a:t>
             </a:fld>
             <a:endParaRPr lang="en-US"/>
           </a:p>
@@ -750,9 +740,10 @@
           <a:lstStyle/>
           <a:p>
             <a:r>
-              <a:rPr lang="en-US"/>
+              <a:rPr lang="en-US" smtClean="0"/>
               <a:t>Click to edit Master title style</a:t>
             </a:r>
+            <a:endParaRPr lang="en-US"/>
           </a:p>
         </p:txBody>
       </p:sp>
@@ -773,37 +764,38 @@
           <a:p>
             <a:pPr lvl="0"/>
             <a:r>
-              <a:rPr lang="en-US"/>
+              <a:rPr lang="en-US" smtClean="0"/>
               <a:t>Click to edit Master text styles</a:t>
             </a:r>
           </a:p>
           <a:p>
             <a:pPr lvl="1"/>
             <a:r>
-              <a:rPr lang="en-US"/>
+              <a:rPr lang="en-US" smtClean="0"/>
               <a:t>Second level</a:t>
             </a:r>
           </a:p>
           <a:p>
             <a:pPr lvl="2"/>
             <a:r>
-              <a:rPr lang="en-US"/>
+              <a:rPr lang="en-US" smtClean="0"/>
               <a:t>Third level</a:t>
             </a:r>
           </a:p>
           <a:p>
             <a:pPr lvl="3"/>
             <a:r>
-              <a:rPr lang="en-US"/>
+              <a:rPr lang="en-US" smtClean="0"/>
               <a:t>Fourth level</a:t>
             </a:r>
           </a:p>
           <a:p>
             <a:pPr lvl="4"/>
             <a:r>
-              <a:rPr lang="en-US"/>
+              <a:rPr lang="en-US" smtClean="0"/>
               <a:t>Fifth level</a:t>
             </a:r>
+            <a:endParaRPr lang="en-US"/>
           </a:p>
         </p:txBody>
       </p:sp>
@@ -824,7 +816,7 @@
           <a:p>
             <a:fld id="{5BCAD085-E8A6-8845-BD4E-CB4CCA059FC4}" type="datetimeFigureOut">
               <a:rPr lang="en-US" smtClean="0"/>
-              <a:t>10/10/2026</a:t>
+              <a:t>1/27/13</a:t>
             </a:fld>
             <a:endParaRPr lang="en-US"/>
           </a:p>
@@ -927,9 +919,10 @@
           </a:lstStyle>
           <a:p>
             <a:r>
-              <a:rPr lang="en-US"/>
+              <a:rPr lang="en-US" smtClean="0"/>
               <a:t>Click to edit Master title style</a:t>
             </a:r>
+            <a:endParaRPr lang="en-US"/>
           </a:p>
         </p:txBody>
       </p:sp>
@@ -1046,7 +1039,7 @@
           <a:p>
             <a:pPr lvl="0"/>
             <a:r>
-              <a:rPr lang="en-US"/>
+              <a:rPr lang="en-US" smtClean="0"/>
               <a:t>Click to edit Master text styles</a:t>
             </a:r>
           </a:p>
@@ -1069,7 +1062,7 @@
           <a:p>
             <a:fld id="{5BCAD085-E8A6-8845-BD4E-CB4CCA059FC4}" type="datetimeFigureOut">
               <a:rPr lang="en-US" smtClean="0"/>
-              <a:t>10/10/2026</a:t>
+              <a:t>1/27/13</a:t>
             </a:fld>
             <a:endParaRPr lang="en-US"/>
           </a:p>
@@ -1163,9 +1156,10 @@
           <a:lstStyle/>
           <a:p>
             <a:r>
-              <a:rPr lang="en-US"/>
+              <a:rPr lang="en-US" smtClean="0"/>
               <a:t>Click to edit Master title style</a:t>
             </a:r>
+            <a:endParaRPr lang="en-US"/>
           </a:p>
         </p:txBody>
       </p:sp>
@@ -1219,37 +1213,38 @@
           <a:p>
             <a:pPr lvl="0"/>
             <a:r>
-              <a:rPr lang="en-US"/>
+              <a:rPr lang="en-US" smtClean="0"/>
               <a:t>Click to edit Master text styles</a:t>
             </a:r>
           </a:p>
           <a:p>
             <a:pPr lvl="1"/>
             <a:r>
-              <a:rPr lang="en-US"/>
+              <a:rPr lang="en-US" smtClean="0"/>
               <a:t>Second level</a:t>
             </a:r>
           </a:p>
           <a:p>
             <a:pPr lvl="2"/>
             <a:r>
-              <a:rPr lang="en-US"/>
+              <a:rPr lang="en-US" smtClean="0"/>
               <a:t>Third level</a:t>
             </a:r>
           </a:p>
           <a:p>
             <a:pPr lvl="3"/>
             <a:r>
-              <a:rPr lang="en-US"/>
+              <a:rPr lang="en-US" smtClean="0"/>
               <a:t>Fourth level</a:t>
             </a:r>
           </a:p>
           <a:p>
             <a:pPr lvl="4"/>
             <a:r>
-              <a:rPr lang="en-US"/>
+              <a:rPr lang="en-US" smtClean="0"/>
               <a:t>Fifth level</a:t>
             </a:r>
+            <a:endParaRPr lang="en-US"/>
           </a:p>
         </p:txBody>
       </p:sp>
@@ -1303,37 +1298,38 @@
           <a:p>
             <a:pPr lvl="0"/>
             <a:r>
-              <a:rPr lang="en-US"/>
+              <a:rPr lang="en-US" smtClean="0"/>
               <a:t>Click to edit Master text styles</a:t>
             </a:r>
           </a:p>
           <a:p>
             <a:pPr lvl="1"/>
             <a:r>
-              <a:rPr lang="en-US"/>
+              <a:rPr lang="en-US" smtClean="0"/>
               <a:t>Second level</a:t>
             </a:r>
           </a:p>
           <a:p>
             <a:pPr lvl="2"/>
             <a:r>
-              <a:rPr lang="en-US"/>
+              <a:rPr lang="en-US" smtClean="0"/>
               <a:t>Third level</a:t>
             </a:r>
           </a:p>
           <a:p>
             <a:pPr lvl="3"/>
             <a:r>
-              <a:rPr lang="en-US"/>
+              <a:rPr lang="en-US" smtClean="0"/>
               <a:t>Fourth level</a:t>
             </a:r>
           </a:p>
           <a:p>
             <a:pPr lvl="4"/>
             <a:r>
-              <a:rPr lang="en-US"/>
+              <a:rPr lang="en-US" smtClean="0"/>
               <a:t>Fifth level</a:t>
             </a:r>
+            <a:endParaRPr lang="en-US"/>
           </a:p>
         </p:txBody>
       </p:sp>
@@ -1354,7 +1350,7 @@
           <a:p>
             <a:fld id="{5BCAD085-E8A6-8845-BD4E-CB4CCA059FC4}" type="datetimeFigureOut">
               <a:rPr lang="en-US" smtClean="0"/>
-              <a:t>10/10/2026</a:t>
+              <a:t>1/27/13</a:t>
             </a:fld>
             <a:endParaRPr lang="en-US"/>
           </a:p>
@@ -1452,9 +1448,10 @@
           </a:lstStyle>
           <a:p>
             <a:r>
-              <a:rPr lang="en-US"/>
+              <a:rPr lang="en-US" smtClean="0"/>
               <a:t>Click to edit Master title style</a:t>
             </a:r>
+            <a:endParaRPr lang="en-US"/>
           </a:p>
         </p:txBody>
       </p:sp>
@@ -1517,7 +1514,7 @@
           <a:p>
             <a:pPr lvl="0"/>
             <a:r>
-              <a:rPr lang="en-US"/>
+              <a:rPr lang="en-US" smtClean="0"/>
               <a:t>Click to edit Master text styles</a:t>
             </a:r>
           </a:p>
@@ -1573,37 +1570,38 @@
           <a:p>
             <a:pPr lvl="0"/>
             <a:r>
-              <a:rPr lang="en-US"/>
+              <a:rPr lang="en-US" smtClean="0"/>
               <a:t>Click to edit Master text styles</a:t>
             </a:r>
           </a:p>
           <a:p>
             <a:pPr lvl="1"/>
             <a:r>
-              <a:rPr lang="en-US"/>
+              <a:rPr lang="en-US" smtClean="0"/>
               <a:t>Second level</a:t>
             </a:r>
           </a:p>
           <a:p>
             <a:pPr lvl="2"/>
             <a:r>
-              <a:rPr lang="en-US"/>
+              <a:rPr lang="en-US" smtClean="0"/>
               <a:t>Third level</a:t>
             </a:r>
           </a:p>
           <a:p>
             <a:pPr lvl="3"/>
             <a:r>
-              <a:rPr lang="en-US"/>
+              <a:rPr lang="en-US" smtClean="0"/>
               <a:t>Fourth level</a:t>
             </a:r>
           </a:p>
           <a:p>
             <a:pPr lvl="4"/>
             <a:r>
-              <a:rPr lang="en-US"/>
+              <a:rPr lang="en-US" smtClean="0"/>
               <a:t>Fifth level</a:t>
             </a:r>
+            <a:endParaRPr lang="en-US"/>
           </a:p>
         </p:txBody>
       </p:sp>
@@ -1666,7 +1664,7 @@
           <a:p>
             <a:pPr lvl="0"/>
             <a:r>
-              <a:rPr lang="en-US"/>
+              <a:rPr lang="en-US" smtClean="0"/>
               <a:t>Click to edit Master text styles</a:t>
             </a:r>
           </a:p>
@@ -1722,37 +1720,38 @@
           <a:p>
             <a:pPr lvl="0"/>
             <a:r>
-              <a:rPr lang="en-US"/>
+              <a:rPr lang="en-US" smtClean="0"/>
               <a:t>Click to edit Master text styles</a:t>
             </a:r>
           </a:p>
           <a:p>
             <a:pPr lvl="1"/>
             <a:r>
-              <a:rPr lang="en-US"/>
+              <a:rPr lang="en-US" smtClean="0"/>
               <a:t>Second level</a:t>
             </a:r>
           </a:p>
           <a:p>
             <a:pPr lvl="2"/>
             <a:r>
-              <a:rPr lang="en-US"/>
+              <a:rPr lang="en-US" smtClean="0"/>
               <a:t>Third level</a:t>
             </a:r>
           </a:p>
           <a:p>
             <a:pPr lvl="3"/>
             <a:r>
-              <a:rPr lang="en-US"/>
+              <a:rPr lang="en-US" smtClean="0"/>
               <a:t>Fourth level</a:t>
             </a:r>
           </a:p>
           <a:p>
             <a:pPr lvl="4"/>
             <a:r>
-              <a:rPr lang="en-US"/>
+              <a:rPr lang="en-US" smtClean="0"/>
               <a:t>Fifth level</a:t>
             </a:r>
+            <a:endParaRPr lang="en-US"/>
           </a:p>
         </p:txBody>
       </p:sp>
@@ -1773,7 +1772,7 @@
           <a:p>
             <a:fld id="{5BCAD085-E8A6-8845-BD4E-CB4CCA059FC4}" type="datetimeFigureOut">
               <a:rPr lang="en-US" smtClean="0"/>
-              <a:t>10/10/2026</a:t>
+              <a:t>1/27/13</a:t>
             </a:fld>
             <a:endParaRPr lang="en-US"/>
           </a:p>
@@ -1867,9 +1866,10 @@
           <a:lstStyle/>
           <a:p>
             <a:r>
-              <a:rPr lang="en-US"/>
+              <a:rPr lang="en-US" smtClean="0"/>
               <a:t>Click to edit Master title style</a:t>
             </a:r>
+            <a:endParaRPr lang="en-US"/>
           </a:p>
         </p:txBody>
       </p:sp>
@@ -1890,7 +1890,7 @@
           <a:p>
             <a:fld id="{5BCAD085-E8A6-8845-BD4E-CB4CCA059FC4}" type="datetimeFigureOut">
               <a:rPr lang="en-US" smtClean="0"/>
-              <a:t>10/10/2026</a:t>
+              <a:t>1/27/13</a:t>
             </a:fld>
             <a:endParaRPr lang="en-US"/>
           </a:p>
@@ -1985,7 +1985,7 @@
           <a:p>
             <a:fld id="{5BCAD085-E8A6-8845-BD4E-CB4CCA059FC4}" type="datetimeFigureOut">
               <a:rPr lang="en-US" smtClean="0"/>
-              <a:t>10/10/2026</a:t>
+              <a:t>1/27/13</a:t>
             </a:fld>
             <a:endParaRPr lang="en-US"/>
           </a:p>
@@ -2088,9 +2088,10 @@
           </a:lstStyle>
           <a:p>
             <a:r>
-              <a:rPr lang="en-US"/>
+              <a:rPr lang="en-US" smtClean="0"/>
               <a:t>Click to edit Master title style</a:t>
             </a:r>
+            <a:endParaRPr lang="en-US"/>
           </a:p>
         </p:txBody>
       </p:sp>
@@ -2144,37 +2145,38 @@
           <a:p>
             <a:pPr lvl="0"/>
             <a:r>
-              <a:rPr lang="en-US"/>
+              <a:rPr lang="en-US" smtClean="0"/>
               <a:t>Click to edit Master text styles</a:t>
             </a:r>
           </a:p>
           <a:p>
             <a:pPr lvl="1"/>
             <a:r>
-              <a:rPr lang="en-US"/>
+              <a:rPr lang="en-US" smtClean="0"/>
               <a:t>Second level</a:t>
             </a:r>
           </a:p>
           <a:p>
             <a:pPr lvl="2"/>
             <a:r>
-              <a:rPr lang="en-US"/>
+              <a:rPr lang="en-US" smtClean="0"/>
               <a:t>Third level</a:t>
             </a:r>
           </a:p>
           <a:p>
             <a:pPr lvl="3"/>
             <a:r>
-              <a:rPr lang="en-US"/>
+              <a:rPr lang="en-US" smtClean="0"/>
               <a:t>Fourth level</a:t>
             </a:r>
           </a:p>
           <a:p>
             <a:pPr lvl="4"/>
             <a:r>
-              <a:rPr lang="en-US"/>
+              <a:rPr lang="en-US" smtClean="0"/>
               <a:t>Fifth level</a:t>
             </a:r>
+            <a:endParaRPr lang="en-US"/>
           </a:p>
         </p:txBody>
       </p:sp>
@@ -2237,7 +2239,7 @@
           <a:p>
             <a:pPr lvl="0"/>
             <a:r>
-              <a:rPr lang="en-US"/>
+              <a:rPr lang="en-US" smtClean="0"/>
               <a:t>Click to edit Master text styles</a:t>
             </a:r>
           </a:p>
@@ -2260,7 +2262,7 @@
           <a:p>
             <a:fld id="{5BCAD085-E8A6-8845-BD4E-CB4CCA059FC4}" type="datetimeFigureOut">
               <a:rPr lang="en-US" smtClean="0"/>
-              <a:t>10/10/2026</a:t>
+              <a:t>1/27/13</a:t>
             </a:fld>
             <a:endParaRPr lang="en-US"/>
           </a:p>
@@ -2363,9 +2365,10 @@
           </a:lstStyle>
           <a:p>
             <a:r>
-              <a:rPr lang="en-US"/>
+              <a:rPr lang="en-US" smtClean="0"/>
               <a:t>Click to edit Master title style</a:t>
             </a:r>
+            <a:endParaRPr lang="en-US"/>
           </a:p>
         </p:txBody>
       </p:sp>
@@ -2489,7 +2492,7 @@
           <a:p>
             <a:pPr lvl="0"/>
             <a:r>
-              <a:rPr lang="en-US"/>
+              <a:rPr lang="en-US" smtClean="0"/>
               <a:t>Click to edit Master text styles</a:t>
             </a:r>
           </a:p>
@@ -2512,7 +2515,7 @@
           <a:p>
             <a:fld id="{5BCAD085-E8A6-8845-BD4E-CB4CCA059FC4}" type="datetimeFigureOut">
               <a:rPr lang="en-US" smtClean="0"/>
-              <a:t>10/10/2026</a:t>
+              <a:t>1/27/13</a:t>
             </a:fld>
             <a:endParaRPr lang="en-US"/>
           </a:p>
@@ -2621,9 +2624,10 @@
           <a:lstStyle/>
           <a:p>
             <a:r>
-              <a:rPr lang="en-US"/>
+              <a:rPr lang="en-US" smtClean="0"/>
               <a:t>Click to edit Master title style</a:t>
             </a:r>
+            <a:endParaRPr lang="en-US"/>
           </a:p>
         </p:txBody>
       </p:sp>
@@ -2654,37 +2658,38 @@
           <a:p>
             <a:pPr lvl="0"/>
             <a:r>
-              <a:rPr lang="en-US"/>
+              <a:rPr lang="en-US" smtClean="0"/>
               <a:t>Click to edit Master text styles</a:t>
             </a:r>
           </a:p>
           <a:p>
             <a:pPr lvl="1"/>
             <a:r>
-              <a:rPr lang="en-US"/>
+              <a:rPr lang="en-US" smtClean="0"/>
               <a:t>Second level</a:t>
             </a:r>
           </a:p>
           <a:p>
             <a:pPr lvl="2"/>
             <a:r>
-              <a:rPr lang="en-US"/>
+              <a:rPr lang="en-US" smtClean="0"/>
               <a:t>Third level</a:t>
             </a:r>
           </a:p>
           <a:p>
             <a:pPr lvl="3"/>
             <a:r>
-              <a:rPr lang="en-US"/>
+              <a:rPr lang="en-US" smtClean="0"/>
               <a:t>Fourth level</a:t>
             </a:r>
           </a:p>
           <a:p>
             <a:pPr lvl="4"/>
             <a:r>
-              <a:rPr lang="en-US"/>
+              <a:rPr lang="en-US" smtClean="0"/>
               <a:t>Fifth level</a:t>
             </a:r>
+            <a:endParaRPr lang="en-US"/>
           </a:p>
         </p:txBody>
       </p:sp>
@@ -2723,7 +2728,7 @@
           <a:p>
             <a:fld id="{5BCAD085-E8A6-8845-BD4E-CB4CCA059FC4}" type="datetimeFigureOut">
               <a:rPr lang="en-US" smtClean="0"/>
-              <a:t>10/10/2026</a:t>
+              <a:t>1/27/13</a:t>
             </a:fld>
             <a:endParaRPr lang="en-US"/>
           </a:p>
@@ -3082,7 +3087,7 @@
 </file>
 
 <file path=ppt/slides/slide1.xml><?xml version="1.0" encoding="utf-8"?>
-<p:sld xmlns:a="http://schemas.openxmlformats.org/drawingml/2006/main" xmlns:r="http://schemas.openxmlformats.org/officeDocument/2006/relationships" xmlns:p="http://schemas.openxmlformats.org/presentationml/2006/main">
+<p:sld xmlns:a="http://schemas.openxmlformats.org/drawingml/2006/main" xmlns:p="http://schemas.openxmlformats.org/presentationml/2006/main" xmlns:r="http://schemas.openxmlformats.org/officeDocument/2006/relationships">
   <p:cSld>
     <p:spTree>
       <p:nvGrpSpPr>
@@ -3090,14 +3095,7 @@
         <p:cNvGrpSpPr/>
         <p:nvPr/>
       </p:nvGrpSpPr>
-      <p:grpSpPr>
-        <a:xfrm>
-          <a:off x="0" y="0"/>
-          <a:ext cx="0" cy="0"/>
-          <a:chOff x="0" y="0"/>
-          <a:chExt cx="0" cy="0"/>
-        </a:xfrm>
-      </p:grpSpPr>
+      <p:grpSpPr/>
       <p:sp>
         <p:nvSpPr>
           <p:cNvPr id="2" name="Rectangle 1"/>
@@ -3138,7 +3136,6 @@
           <a:lstStyle/>
           <a:p>
             <a:pPr algn="ctr"/>
-            <a:endParaRPr/>
           </a:p>
         </p:txBody>
       </p:sp>
@@ -3182,7 +3179,6 @@
           <a:lstStyle/>
           <a:p>
             <a:pPr algn="ctr"/>
-            <a:endParaRPr/>
           </a:p>
         </p:txBody>
       </p:sp>
@@ -3214,6 +3210,7 @@
                 </a:solidFill>
                 <a:latin typeface="微软雅黑"/>
                 <a:ea typeface="微软雅黑"/>
+                <a:latin typeface="微软雅黑"/>
               </a:rPr>
               <a:t>普炳软件</a:t>
             </a:r>
@@ -3283,6 +3280,7 @@
                 </a:solidFill>
                 <a:latin typeface="微软雅黑"/>
                 <a:ea typeface="微软雅黑"/>
+                <a:latin typeface="微软雅黑"/>
               </a:rPr>
               <a:t>从靠人做表，到公司能力</a:t>
             </a:r>
@@ -3311,22 +3309,16 @@
           <a:p>
             <a:pPr algn="l"/>
             <a:r>
-              <a:rPr sz="4000" b="1" dirty="0" err="1">
+              <a:rPr sz="4000" b="1">
                 <a:solidFill>
                   <a:srgbClr val="FFFFFF"/>
                 </a:solidFill>
                 <a:latin typeface="微软雅黑"/>
                 <a:ea typeface="微软雅黑"/>
+                <a:latin typeface="微软雅黑"/>
               </a:rPr>
               <a:t>结构件自动核价平台</a:t>
             </a:r>
-            <a:endParaRPr sz="4000" b="1" dirty="0">
-              <a:solidFill>
-                <a:srgbClr val="FFFFFF"/>
-              </a:solidFill>
-              <a:latin typeface="微软雅黑"/>
-              <a:ea typeface="微软雅黑"/>
-            </a:endParaRPr>
           </a:p>
         </p:txBody>
       </p:sp>
@@ -3356,24 +3348,15 @@
               </a:lnSpc>
             </a:pPr>
             <a:r>
-              <a:rPr sz="2200" b="0" dirty="0" err="1">
+              <a:rPr sz="2200" b="0">
                 <a:solidFill>
                   <a:srgbClr val="C8C8C8"/>
                 </a:solidFill>
                 <a:latin typeface="微软雅黑"/>
                 <a:ea typeface="微软雅黑"/>
-              </a:rPr>
-              <a:t>管理人员是公司的建设者</a:t>
-            </a:r>
-            <a:r>
-              <a:rPr sz="2200" b="0" dirty="0">
-                <a:solidFill>
-                  <a:srgbClr val="C8C8C8"/>
-                </a:solidFill>
-                <a:latin typeface="微软雅黑"/>
-                <a:ea typeface="微软雅黑"/>
-              </a:rPr>
-              <a:t>。</a:t>
+                <a:latin typeface="微软雅黑"/>
+              </a:rPr>
+              <a:t>管理人员是公司的建设者。</a:t>
             </a:r>
           </a:p>
           <a:p>
@@ -3383,134 +3366,16 @@
               </a:lnSpc>
             </a:pPr>
             <a:r>
-              <a:rPr sz="2200" b="0" dirty="0" err="1">
+              <a:rPr sz="2200" b="0">
                 <a:solidFill>
                   <a:srgbClr val="C8C8C8"/>
                 </a:solidFill>
                 <a:latin typeface="微软雅黑"/>
                 <a:ea typeface="微软雅黑"/>
-              </a:rPr>
-              <a:t>进出两头的钱，不能再交给几个人的表</a:t>
-            </a:r>
-            <a:r>
-              <a:rPr sz="2200" b="0" dirty="0">
-                <a:solidFill>
-                  <a:srgbClr val="C8C8C8"/>
-                </a:solidFill>
-                <a:latin typeface="微软雅黑"/>
-                <a:ea typeface="微软雅黑"/>
-              </a:rPr>
-              <a:t>。</a:t>
-            </a:r>
-            <a:endParaRPr lang="en-US" sz="2200" b="0" dirty="0">
-              <a:solidFill>
-                <a:srgbClr val="C8C8C8"/>
-              </a:solidFill>
-              <a:latin typeface="微软雅黑"/>
-              <a:ea typeface="微软雅黑"/>
-            </a:endParaRPr>
-          </a:p>
-          <a:p>
-            <a:pPr algn="l">
-              <a:lnSpc>
-                <a:spcPts val="3600"/>
-              </a:lnSpc>
-            </a:pPr>
-            <a:endParaRPr lang="en-US" sz="2200" dirty="0">
-              <a:solidFill>
-                <a:srgbClr val="C8C8C8"/>
-              </a:solidFill>
-              <a:latin typeface="微软雅黑"/>
-              <a:ea typeface="微软雅黑"/>
-            </a:endParaRPr>
-          </a:p>
-          <a:p>
-            <a:pPr>
-              <a:lnSpc>
-                <a:spcPts val="3600"/>
-              </a:lnSpc>
-            </a:pPr>
-            <a:r>
-              <a:rPr lang="en-US" altLang="zh-CN" dirty="0">
-                <a:solidFill>
-                  <a:srgbClr val="FF0000"/>
-                </a:solidFill>
-                <a:latin typeface="微软雅黑"/>
-                <a:ea typeface="微软雅黑"/>
-                <a:hlinkClick r:id="rId2">
-                  <a:extLst>
-                    <a:ext uri="{A12FA001-AC4F-418D-AE19-62706E023703}">
-                      <ahyp:hlinkClr xmlns:ahyp="http://schemas.microsoft.com/office/drawing/2018/hyperlinkcolor" val="tx"/>
-                    </a:ext>
-                  </a:extLst>
-                </a:hlinkClick>
-              </a:rPr>
-              <a:t>http://117.143.214.90:8000/</a:t>
-            </a:r>
-            <a:r>
-              <a:rPr lang="en-US" altLang="zh-CN" dirty="0">
-                <a:solidFill>
-                  <a:srgbClr val="C8C8C8"/>
-                </a:solidFill>
-                <a:latin typeface="微软雅黑"/>
-                <a:ea typeface="微软雅黑"/>
-              </a:rPr>
-              <a:t>  </a:t>
-            </a:r>
-            <a:r>
-              <a:rPr lang="zh-CN" altLang="en-US" dirty="0">
-                <a:solidFill>
-                  <a:srgbClr val="C8C8C8"/>
-                </a:solidFill>
-                <a:latin typeface="微软雅黑"/>
-                <a:ea typeface="微软雅黑"/>
-              </a:rPr>
-              <a:t>用户名：</a:t>
-            </a:r>
-            <a:r>
-              <a:rPr lang="en-US" altLang="zh-CN" dirty="0">
-                <a:solidFill>
-                  <a:srgbClr val="C8C8C8"/>
-                </a:solidFill>
-                <a:latin typeface="微软雅黑"/>
-                <a:ea typeface="微软雅黑"/>
-              </a:rPr>
-              <a:t>admin </a:t>
-            </a:r>
-            <a:r>
-              <a:rPr lang="zh-CN" altLang="en-US" dirty="0">
-                <a:solidFill>
-                  <a:srgbClr val="C8C8C8"/>
-                </a:solidFill>
-                <a:latin typeface="微软雅黑"/>
-                <a:ea typeface="微软雅黑"/>
-              </a:rPr>
-              <a:t>密码：</a:t>
-            </a:r>
-            <a:r>
-              <a:rPr lang="en-US" altLang="zh-CN" dirty="0">
-                <a:solidFill>
-                  <a:srgbClr val="C8C8C8"/>
-                </a:solidFill>
-                <a:latin typeface="微软雅黑"/>
-                <a:ea typeface="微软雅黑"/>
-              </a:rPr>
-              <a:t>admin123</a:t>
-            </a:r>
-          </a:p>
-          <a:p>
-            <a:pPr algn="l">
-              <a:lnSpc>
-                <a:spcPts val="3600"/>
-              </a:lnSpc>
-            </a:pPr>
-            <a:endParaRPr sz="2200" b="0" dirty="0">
-              <a:solidFill>
-                <a:srgbClr val="C8C8C8"/>
-              </a:solidFill>
-              <a:latin typeface="微软雅黑"/>
-              <a:ea typeface="微软雅黑"/>
-            </a:endParaRPr>
+                <a:latin typeface="微软雅黑"/>
+              </a:rPr>
+              <a:t>进出两头的钱，不能再交给几个人的表。</a:t>
+            </a:r>
           </a:p>
         </p:txBody>
       </p:sp>
@@ -3522,6 +3387,76 @@
         </p:nvSpPr>
         <p:spPr>
           <a:xfrm>
+            <a:off x="640080" y="4754880"/>
+            <a:ext cx="10424160" cy="365760"/>
+          </a:xfrm>
+          <a:prstGeom prst="rect">
+            <a:avLst/>
+          </a:prstGeom>
+          <a:noFill/>
+        </p:spPr>
+        <p:txBody>
+          <a:bodyPr wrap="square" anchor="t"/>
+          <a:lstStyle/>
+          <a:p>
+            <a:pPr algn="l"/>
+            <a:r>
+              <a:rPr sz="1600" b="0">
+                <a:solidFill>
+                  <a:srgbClr val="D04A02"/>
+                </a:solidFill>
+                <a:latin typeface="微软雅黑"/>
+                <a:ea typeface="微软雅黑"/>
+                <a:latin typeface="微软雅黑"/>
+              </a:rPr>
+              <a:t>试用地址  http://117.143.214.90:8000/</a:t>
+            </a:r>
+          </a:p>
+        </p:txBody>
+      </p:sp>
+      <p:sp>
+        <p:nvSpPr>
+          <p:cNvPr id="10" name="TextBox 9"/>
+          <p:cNvSpPr txBox="1"/>
+          <p:nvPr/>
+        </p:nvSpPr>
+        <p:spPr>
+          <a:xfrm>
+            <a:off x="640080" y="5166360"/>
+            <a:ext cx="10424160" cy="365760"/>
+          </a:xfrm>
+          <a:prstGeom prst="rect">
+            <a:avLst/>
+          </a:prstGeom>
+          <a:noFill/>
+        </p:spPr>
+        <p:txBody>
+          <a:bodyPr wrap="square" anchor="t"/>
+          <a:lstStyle/>
+          <a:p>
+            <a:pPr algn="l"/>
+            <a:r>
+              <a:rPr sz="1600" b="0">
+                <a:solidFill>
+                  <a:srgbClr val="C8C8C8"/>
+                </a:solidFill>
+                <a:latin typeface="微软雅黑"/>
+                <a:ea typeface="微软雅黑"/>
+                <a:latin typeface="微软雅黑"/>
+              </a:rPr>
+              <a:t>默认账号  admin / admin123</a:t>
+            </a:r>
+          </a:p>
+        </p:txBody>
+      </p:sp>
+      <p:sp>
+        <p:nvSpPr>
+          <p:cNvPr id="11" name="TextBox 10"/>
+          <p:cNvSpPr txBox="1"/>
+          <p:nvPr/>
+        </p:nvSpPr>
+        <p:spPr>
+          <a:xfrm>
             <a:off x="640080" y="6263640"/>
             <a:ext cx="7315200" cy="274320"/>
           </a:xfrm>
@@ -3542,6 +3477,7 @@
                 </a:solidFill>
                 <a:latin typeface="微软雅黑"/>
                 <a:ea typeface="微软雅黑"/>
+                <a:latin typeface="微软雅黑"/>
               </a:rPr>
               <a:t>普炳软件</a:t>
             </a:r>
@@ -3550,7 +3486,7 @@
       </p:sp>
       <p:sp>
         <p:nvSpPr>
-          <p:cNvPr id="10" name="TextBox 9"/>
+          <p:cNvPr id="12" name="TextBox 11"/>
           <p:cNvSpPr txBox="1"/>
           <p:nvPr/>
         </p:nvSpPr>
@@ -3576,6 +3512,7 @@
                 </a:solidFill>
                 <a:latin typeface="Arial"/>
                 <a:ea typeface="微软雅黑"/>
+                <a:latin typeface="Arial"/>
               </a:rPr>
               <a:t>1 / 9</a:t>
             </a:r>
@@ -3591,7 +3528,7 @@
 </file>
 
 <file path=ppt/slides/slide2.xml><?xml version="1.0" encoding="utf-8"?>
-<p:sld xmlns:a="http://schemas.openxmlformats.org/drawingml/2006/main" xmlns:r="http://schemas.openxmlformats.org/officeDocument/2006/relationships" xmlns:p="http://schemas.openxmlformats.org/presentationml/2006/main">
+<p:sld xmlns:a="http://schemas.openxmlformats.org/drawingml/2006/main" xmlns:p="http://schemas.openxmlformats.org/presentationml/2006/main" xmlns:r="http://schemas.openxmlformats.org/officeDocument/2006/relationships">
   <p:cSld>
     <p:spTree>
       <p:nvGrpSpPr>
@@ -3599,14 +3536,7 @@
         <p:cNvGrpSpPr/>
         <p:nvPr/>
       </p:nvGrpSpPr>
-      <p:grpSpPr>
-        <a:xfrm>
-          <a:off x="0" y="0"/>
-          <a:ext cx="0" cy="0"/>
-          <a:chOff x="0" y="0"/>
-          <a:chExt cx="0" cy="0"/>
-        </a:xfrm>
-      </p:grpSpPr>
+      <p:grpSpPr/>
       <p:sp>
         <p:nvSpPr>
           <p:cNvPr id="2" name="Rectangle 1"/>
@@ -3647,7 +3577,6 @@
           <a:lstStyle/>
           <a:p>
             <a:pPr algn="ctr"/>
-            <a:endParaRPr/>
           </a:p>
         </p:txBody>
       </p:sp>
@@ -3691,7 +3620,6 @@
           <a:lstStyle/>
           <a:p>
             <a:pPr algn="ctr"/>
-            <a:endParaRPr/>
           </a:p>
         </p:txBody>
       </p:sp>
@@ -3735,7 +3663,6 @@
           <a:lstStyle/>
           <a:p>
             <a:pPr algn="ctr"/>
-            <a:endParaRPr/>
           </a:p>
         </p:txBody>
       </p:sp>
@@ -3767,6 +3694,7 @@
                 </a:solidFill>
                 <a:latin typeface="Arial"/>
                 <a:ea typeface="微软雅黑"/>
+                <a:latin typeface="Arial"/>
               </a:rPr>
               <a:t>01   THE COST</a:t>
             </a:r>
@@ -3801,6 +3729,7 @@
                 </a:solidFill>
                 <a:latin typeface="微软雅黑"/>
                 <a:ea typeface="微软雅黑"/>
+                <a:latin typeface="微软雅黑"/>
               </a:rPr>
               <a:t>现在核价绑在人身上，对账只能扯皮</a:t>
             </a:r>
@@ -3849,7 +3778,6 @@
           <a:lstStyle/>
           <a:p>
             <a:pPr algn="ctr"/>
-            <a:endParaRPr/>
           </a:p>
         </p:txBody>
       </p:sp>
@@ -3893,7 +3821,6 @@
           <a:lstStyle/>
           <a:p>
             <a:pPr algn="ctr"/>
-            <a:endParaRPr/>
           </a:p>
         </p:txBody>
       </p:sp>
@@ -3925,6 +3852,7 @@
                 </a:solidFill>
                 <a:latin typeface="微软雅黑"/>
                 <a:ea typeface="微软雅黑"/>
+                <a:latin typeface="微软雅黑"/>
               </a:rPr>
               <a:t>对人依赖</a:t>
             </a:r>
@@ -3963,6 +3891,7 @@
                 </a:solidFill>
                 <a:latin typeface="微软雅黑"/>
                 <a:ea typeface="微软雅黑"/>
+                <a:latin typeface="微软雅黑"/>
               </a:rPr>
               <a:t>会做表的人一走，</a:t>
             </a:r>
@@ -3980,6 +3909,7 @@
                 </a:solidFill>
                 <a:latin typeface="微软雅黑"/>
                 <a:ea typeface="微软雅黑"/>
+                <a:latin typeface="微软雅黑"/>
               </a:rPr>
               <a:t>账就停</a:t>
             </a:r>
@@ -4018,6 +3948,7 @@
                 </a:solidFill>
                 <a:latin typeface="微软雅黑"/>
                 <a:ea typeface="微软雅黑"/>
+                <a:latin typeface="微软雅黑"/>
               </a:rPr>
               <a:t>一事一议、总成、采购对象在骨干电脑里。</a:t>
             </a:r>
@@ -4035,6 +3966,7 @@
                 </a:solidFill>
                 <a:latin typeface="微软雅黑"/>
                 <a:ea typeface="微软雅黑"/>
+                <a:latin typeface="微软雅黑"/>
               </a:rPr>
               <a:t>人请假、离职，公司没有第二本账。</a:t>
             </a:r>
@@ -4083,7 +4015,6 @@
           <a:lstStyle/>
           <a:p>
             <a:pPr algn="ctr"/>
-            <a:endParaRPr/>
           </a:p>
         </p:txBody>
       </p:sp>
@@ -4127,7 +4058,6 @@
           <a:lstStyle/>
           <a:p>
             <a:pPr algn="ctr"/>
-            <a:endParaRPr/>
           </a:p>
         </p:txBody>
       </p:sp>
@@ -4159,6 +4089,7 @@
                 </a:solidFill>
                 <a:latin typeface="微软雅黑"/>
                 <a:ea typeface="微软雅黑"/>
+                <a:latin typeface="微软雅黑"/>
               </a:rPr>
               <a:t>扯皮</a:t>
             </a:r>
@@ -4197,6 +4128,7 @@
                 </a:solidFill>
                 <a:latin typeface="微软雅黑"/>
                 <a:ea typeface="微软雅黑"/>
+                <a:latin typeface="微软雅黑"/>
               </a:rPr>
               <a:t>各执一份 Excel，</a:t>
             </a:r>
@@ -4214,6 +4146,7 @@
                 </a:solidFill>
                 <a:latin typeface="微软雅黑"/>
                 <a:ea typeface="微软雅黑"/>
+                <a:latin typeface="微软雅黑"/>
               </a:rPr>
               <a:t>说不清哪一版</a:t>
             </a:r>
@@ -4252,6 +4185,7 @@
                 </a:solidFill>
                 <a:latin typeface="微软雅黑"/>
                 <a:ea typeface="微软雅黑"/>
+                <a:latin typeface="微软雅黑"/>
               </a:rPr>
               <a:t>对奇瑞、对二级商、对内部财务，各拿各的表。用过哪份文件、谁改的、当期哪版，对不上就只能吵。</a:t>
             </a:r>
@@ -4321,6 +4255,7 @@
                 </a:solidFill>
                 <a:latin typeface="微软雅黑"/>
                 <a:ea typeface="微软雅黑"/>
+                <a:latin typeface="微软雅黑"/>
               </a:rPr>
               <a:t>普炳软件  ·  核价平台</a:t>
             </a:r>
@@ -4355,6 +4290,7 @@
                 </a:solidFill>
                 <a:latin typeface="Arial"/>
                 <a:ea typeface="微软雅黑"/>
+                <a:latin typeface="Arial"/>
               </a:rPr>
               <a:t>2 / 9</a:t>
             </a:r>
@@ -4370,7 +4306,7 @@
 </file>
 
 <file path=ppt/slides/slide3.xml><?xml version="1.0" encoding="utf-8"?>
-<p:sld xmlns:a="http://schemas.openxmlformats.org/drawingml/2006/main" xmlns:r="http://schemas.openxmlformats.org/officeDocument/2006/relationships" xmlns:p="http://schemas.openxmlformats.org/presentationml/2006/main">
+<p:sld xmlns:a="http://schemas.openxmlformats.org/drawingml/2006/main" xmlns:p="http://schemas.openxmlformats.org/presentationml/2006/main" xmlns:r="http://schemas.openxmlformats.org/officeDocument/2006/relationships">
   <p:cSld>
     <p:spTree>
       <p:nvGrpSpPr>
@@ -4378,14 +4314,7 @@
         <p:cNvGrpSpPr/>
         <p:nvPr/>
       </p:nvGrpSpPr>
-      <p:grpSpPr>
-        <a:xfrm>
-          <a:off x="0" y="0"/>
-          <a:ext cx="0" cy="0"/>
-          <a:chOff x="0" y="0"/>
-          <a:chExt cx="0" cy="0"/>
-        </a:xfrm>
-      </p:grpSpPr>
+      <p:grpSpPr/>
       <p:sp>
         <p:nvSpPr>
           <p:cNvPr id="2" name="Rectangle 1"/>
@@ -4426,7 +4355,6 @@
           <a:lstStyle/>
           <a:p>
             <a:pPr algn="ctr"/>
-            <a:endParaRPr/>
           </a:p>
         </p:txBody>
       </p:sp>
@@ -4470,7 +4398,6 @@
           <a:lstStyle/>
           <a:p>
             <a:pPr algn="ctr"/>
-            <a:endParaRPr/>
           </a:p>
         </p:txBody>
       </p:sp>
@@ -4514,7 +4441,6 @@
           <a:lstStyle/>
           <a:p>
             <a:pPr algn="ctr"/>
-            <a:endParaRPr/>
           </a:p>
         </p:txBody>
       </p:sp>
@@ -4546,6 +4472,7 @@
                 </a:solidFill>
                 <a:latin typeface="Arial"/>
                 <a:ea typeface="微软雅黑"/>
+                <a:latin typeface="Arial"/>
               </a:rPr>
               <a:t>02   THE MONEY</a:t>
             </a:r>
@@ -4580,6 +4507,7 @@
                 </a:solidFill>
                 <a:latin typeface="微软雅黑"/>
                 <a:ea typeface="微软雅黑"/>
+                <a:latin typeface="微软雅黑"/>
               </a:rPr>
               <a:t>漏的是两本钱，吵的是设变这本糊涂账</a:t>
             </a:r>
@@ -4628,7 +4556,6 @@
           <a:lstStyle/>
           <a:p>
             <a:pPr algn="ctr"/>
-            <a:endParaRPr/>
           </a:p>
         </p:txBody>
       </p:sp>
@@ -4672,7 +4599,6 @@
           <a:lstStyle/>
           <a:p>
             <a:pPr algn="ctr"/>
-            <a:endParaRPr/>
           </a:p>
         </p:txBody>
       </p:sp>
@@ -4704,6 +4630,7 @@
                 </a:solidFill>
                 <a:latin typeface="微软雅黑"/>
                 <a:ea typeface="微软雅黑"/>
+                <a:latin typeface="微软雅黑"/>
               </a:rPr>
               <a:t>商务</a:t>
             </a:r>
@@ -4738,6 +4665,7 @@
                 </a:solidFill>
                 <a:latin typeface="微软雅黑"/>
                 <a:ea typeface="微软雅黑"/>
+                <a:latin typeface="微软雅黑"/>
               </a:rPr>
               <a:t>总成价</a:t>
             </a:r>
@@ -4776,6 +4704,7 @@
                 </a:solidFill>
                 <a:latin typeface="微软雅黑"/>
                 <a:ea typeface="微软雅黑"/>
+                <a:latin typeface="微软雅黑"/>
               </a:rPr>
               <a:t>开票给奇瑞的售价。谈价、开票、对账看这一本。</a:t>
             </a:r>
@@ -4793,6 +4722,7 @@
                 </a:solidFill>
                 <a:latin typeface="微软雅黑"/>
                 <a:ea typeface="微软雅黑"/>
+                <a:latin typeface="微软雅黑"/>
               </a:rPr>
               <a:t>算不准就是少收或超承诺。</a:t>
             </a:r>
@@ -4841,7 +4771,6 @@
           <a:lstStyle/>
           <a:p>
             <a:pPr algn="ctr"/>
-            <a:endParaRPr/>
           </a:p>
         </p:txBody>
       </p:sp>
@@ -4885,7 +4814,6 @@
           <a:lstStyle/>
           <a:p>
             <a:pPr algn="ctr"/>
-            <a:endParaRPr/>
           </a:p>
         </p:txBody>
       </p:sp>
@@ -4917,6 +4845,7 @@
                 </a:solidFill>
                 <a:latin typeface="微软雅黑"/>
                 <a:ea typeface="微软雅黑"/>
+                <a:latin typeface="微软雅黑"/>
               </a:rPr>
               <a:t>采购</a:t>
             </a:r>
@@ -4951,6 +4880,7 @@
                 </a:solidFill>
                 <a:latin typeface="微软雅黑"/>
                 <a:ea typeface="微软雅黑"/>
+                <a:latin typeface="微软雅黑"/>
               </a:rPr>
               <a:t>采购对象</a:t>
             </a:r>
@@ -4989,6 +4919,7 @@
                 </a:solidFill>
                 <a:latin typeface="微软雅黑"/>
                 <a:ea typeface="微软雅黑"/>
+                <a:latin typeface="微软雅黑"/>
               </a:rPr>
               <a:t>向二级商采购的价。该付多少、协议怎么签看这一本。</a:t>
             </a:r>
@@ -5006,6 +4937,7 @@
                 </a:solidFill>
                 <a:latin typeface="微软雅黑"/>
                 <a:ea typeface="微软雅黑"/>
+                <a:latin typeface="微软雅黑"/>
               </a:rPr>
               <a:t>算不准就是多付或付旧件。</a:t>
             </a:r>
@@ -5054,7 +4986,6 @@
           <a:lstStyle/>
           <a:p>
             <a:pPr algn="ctr"/>
-            <a:endParaRPr/>
           </a:p>
         </p:txBody>
       </p:sp>
@@ -5098,7 +5029,6 @@
           <a:lstStyle/>
           <a:p>
             <a:pPr algn="ctr"/>
-            <a:endParaRPr/>
           </a:p>
         </p:txBody>
       </p:sp>
@@ -5130,6 +5060,7 @@
                 </a:solidFill>
                 <a:latin typeface="微软雅黑"/>
                 <a:ea typeface="微软雅黑"/>
+                <a:latin typeface="微软雅黑"/>
               </a:rPr>
               <a:t>工程</a:t>
             </a:r>
@@ -5164,6 +5095,7 @@
                 </a:solidFill>
                 <a:latin typeface="微软雅黑"/>
                 <a:ea typeface="微软雅黑"/>
+                <a:latin typeface="微软雅黑"/>
               </a:rPr>
               <a:t>设变</a:t>
             </a:r>
@@ -5202,6 +5134,7 @@
                 </a:solidFill>
                 <a:latin typeface="微软雅黑"/>
                 <a:ea typeface="微软雅黑"/>
+                <a:latin typeface="微软雅黑"/>
               </a:rPr>
               <a:t>Excel 里改一层漏一层。</a:t>
             </a:r>
@@ -5219,6 +5152,7 @@
                 </a:solidFill>
                 <a:latin typeface="微软雅黑"/>
                 <a:ea typeface="微软雅黑"/>
+                <a:latin typeface="微软雅黑"/>
               </a:rPr>
               <a:t>商务可能还按旧总成开票，采购可能还按旧对象付款。</a:t>
             </a:r>
@@ -5288,6 +5222,7 @@
                 </a:solidFill>
                 <a:latin typeface="微软雅黑"/>
                 <a:ea typeface="微软雅黑"/>
+                <a:latin typeface="微软雅黑"/>
               </a:rPr>
               <a:t>普炳软件  ·  核价平台</a:t>
             </a:r>
@@ -5322,6 +5257,7 @@
                 </a:solidFill>
                 <a:latin typeface="Arial"/>
                 <a:ea typeface="微软雅黑"/>
+                <a:latin typeface="Arial"/>
               </a:rPr>
               <a:t>3 / 9</a:t>
             </a:r>
@@ -5337,7 +5273,7 @@
 </file>
 
 <file path=ppt/slides/slide4.xml><?xml version="1.0" encoding="utf-8"?>
-<p:sld xmlns:a="http://schemas.openxmlformats.org/drawingml/2006/main" xmlns:r="http://schemas.openxmlformats.org/officeDocument/2006/relationships" xmlns:p="http://schemas.openxmlformats.org/presentationml/2006/main">
+<p:sld xmlns:a="http://schemas.openxmlformats.org/drawingml/2006/main" xmlns:p="http://schemas.openxmlformats.org/presentationml/2006/main" xmlns:r="http://schemas.openxmlformats.org/officeDocument/2006/relationships">
   <p:cSld>
     <p:spTree>
       <p:nvGrpSpPr>
@@ -5345,14 +5281,7 @@
         <p:cNvGrpSpPr/>
         <p:nvPr/>
       </p:nvGrpSpPr>
-      <p:grpSpPr>
-        <a:xfrm>
-          <a:off x="0" y="0"/>
-          <a:ext cx="0" cy="0"/>
-          <a:chOff x="0" y="0"/>
-          <a:chExt cx="0" cy="0"/>
-        </a:xfrm>
-      </p:grpSpPr>
+      <p:grpSpPr/>
       <p:sp>
         <p:nvSpPr>
           <p:cNvPr id="2" name="Rectangle 1"/>
@@ -5393,7 +5322,6 @@
           <a:lstStyle/>
           <a:p>
             <a:pPr algn="ctr"/>
-            <a:endParaRPr/>
           </a:p>
         </p:txBody>
       </p:sp>
@@ -5437,7 +5365,6 @@
           <a:lstStyle/>
           <a:p>
             <a:pPr algn="ctr"/>
-            <a:endParaRPr/>
           </a:p>
         </p:txBody>
       </p:sp>
@@ -5481,7 +5408,6 @@
           <a:lstStyle/>
           <a:p>
             <a:pPr algn="ctr"/>
-            <a:endParaRPr/>
           </a:p>
         </p:txBody>
       </p:sp>
@@ -5513,6 +5439,7 @@
                 </a:solidFill>
                 <a:latin typeface="Arial"/>
                 <a:ea typeface="微软雅黑"/>
+                <a:latin typeface="Arial"/>
               </a:rPr>
               <a:t>03   THE CHOICE</a:t>
             </a:r>
@@ -5547,6 +5474,7 @@
                 </a:solidFill>
                 <a:latin typeface="微软雅黑"/>
                 <a:ea typeface="微软雅黑"/>
+                <a:latin typeface="微软雅黑"/>
               </a:rPr>
               <a:t>不做成公司能力，就是把公司的钱交给个人记忆</a:t>
             </a:r>
@@ -5595,7 +5523,6 @@
           <a:lstStyle/>
           <a:p>
             <a:pPr algn="ctr"/>
-            <a:endParaRPr/>
           </a:p>
         </p:txBody>
       </p:sp>
@@ -5639,7 +5566,6 @@
           <a:lstStyle/>
           <a:p>
             <a:pPr algn="ctr"/>
-            <a:endParaRPr/>
           </a:p>
         </p:txBody>
       </p:sp>
@@ -5671,6 +5597,7 @@
                 </a:solidFill>
                 <a:latin typeface="微软雅黑"/>
                 <a:ea typeface="微软雅黑"/>
+                <a:latin typeface="微软雅黑"/>
               </a:rPr>
               <a:t>继续 Excel</a:t>
             </a:r>
@@ -5709,6 +5636,7 @@
                 </a:solidFill>
                 <a:latin typeface="微软雅黑"/>
                 <a:ea typeface="微软雅黑"/>
+                <a:latin typeface="微软雅黑"/>
               </a:rPr>
               <a:t>进出两头的账</a:t>
             </a:r>
@@ -5726,6 +5654,7 @@
                 </a:solidFill>
                 <a:latin typeface="微软雅黑"/>
                 <a:ea typeface="微软雅黑"/>
+                <a:latin typeface="微软雅黑"/>
               </a:rPr>
               <a:t>在私人文件夹里</a:t>
             </a:r>
@@ -5764,6 +5693,7 @@
                 </a:solidFill>
                 <a:latin typeface="微软雅黑"/>
                 <a:ea typeface="微软雅黑"/>
+                <a:latin typeface="微软雅黑"/>
               </a:rPr>
               <a:t>人走、表散、设变对不上。开给奇瑞的价和付给二级商的价，对账时只能各执一词。</a:t>
             </a:r>
@@ -5781,6 +5711,7 @@
                 </a:solidFill>
                 <a:latin typeface="微软雅黑"/>
                 <a:ea typeface="微软雅黑"/>
+                <a:latin typeface="微软雅黑"/>
               </a:rPr>
               <a:t>管理人员说不过去。</a:t>
             </a:r>
@@ -5829,7 +5760,6 @@
           <a:lstStyle/>
           <a:p>
             <a:pPr algn="ctr"/>
-            <a:endParaRPr/>
           </a:p>
         </p:txBody>
       </p:sp>
@@ -5873,7 +5803,6 @@
           <a:lstStyle/>
           <a:p>
             <a:pPr algn="ctr"/>
-            <a:endParaRPr/>
           </a:p>
         </p:txBody>
       </p:sp>
@@ -5905,6 +5834,7 @@
                 </a:solidFill>
                 <a:latin typeface="微软雅黑"/>
                 <a:ea typeface="微软雅黑"/>
+                <a:latin typeface="微软雅黑"/>
               </a:rPr>
               <a:t>做成能力</a:t>
             </a:r>
@@ -5943,6 +5873,7 @@
                 </a:solidFill>
                 <a:latin typeface="微软雅黑"/>
                 <a:ea typeface="微软雅黑"/>
+                <a:latin typeface="微软雅黑"/>
               </a:rPr>
               <a:t>规则、依据、结果</a:t>
             </a:r>
@@ -5960,6 +5891,7 @@
                 </a:solidFill>
                 <a:latin typeface="微软雅黑"/>
                 <a:ea typeface="微软雅黑"/>
+                <a:latin typeface="微软雅黑"/>
               </a:rPr>
               <a:t>留在公司</a:t>
             </a:r>
@@ -5998,6 +5930,7 @@
                 </a:solidFill>
                 <a:latin typeface="微软雅黑"/>
                 <a:ea typeface="微软雅黑"/>
+                <a:latin typeface="微软雅黑"/>
               </a:rPr>
               <a:t>不是再做一张更大的表。是人可以交接，依据可以拿出，两本钱可以对上。</a:t>
             </a:r>
@@ -6015,6 +5948,7 @@
                 </a:solidFill>
                 <a:latin typeface="微软雅黑"/>
                 <a:ea typeface="微软雅黑"/>
+                <a:latin typeface="微软雅黑"/>
               </a:rPr>
               <a:t>这才是建设。</a:t>
             </a:r>
@@ -6084,6 +6018,7 @@
                 </a:solidFill>
                 <a:latin typeface="微软雅黑"/>
                 <a:ea typeface="微软雅黑"/>
+                <a:latin typeface="微软雅黑"/>
               </a:rPr>
               <a:t>普炳软件  ·  核价平台</a:t>
             </a:r>
@@ -6118,6 +6053,7 @@
                 </a:solidFill>
                 <a:latin typeface="Arial"/>
                 <a:ea typeface="微软雅黑"/>
+                <a:latin typeface="Arial"/>
               </a:rPr>
               <a:t>4 / 9</a:t>
             </a:r>
@@ -6133,7 +6069,7 @@
 </file>
 
 <file path=ppt/slides/slide5.xml><?xml version="1.0" encoding="utf-8"?>
-<p:sld xmlns:a="http://schemas.openxmlformats.org/drawingml/2006/main" xmlns:r="http://schemas.openxmlformats.org/officeDocument/2006/relationships" xmlns:p="http://schemas.openxmlformats.org/presentationml/2006/main">
+<p:sld xmlns:a="http://schemas.openxmlformats.org/drawingml/2006/main" xmlns:p="http://schemas.openxmlformats.org/presentationml/2006/main" xmlns:r="http://schemas.openxmlformats.org/officeDocument/2006/relationships">
   <p:cSld>
     <p:spTree>
       <p:nvGrpSpPr>
@@ -6141,14 +6077,7 @@
         <p:cNvGrpSpPr/>
         <p:nvPr/>
       </p:nvGrpSpPr>
-      <p:grpSpPr>
-        <a:xfrm>
-          <a:off x="0" y="0"/>
-          <a:ext cx="0" cy="0"/>
-          <a:chOff x="0" y="0"/>
-          <a:chExt cx="0" cy="0"/>
-        </a:xfrm>
-      </p:grpSpPr>
+      <p:grpSpPr/>
       <p:sp>
         <p:nvSpPr>
           <p:cNvPr id="2" name="Rectangle 1"/>
@@ -6189,7 +6118,6 @@
           <a:lstStyle/>
           <a:p>
             <a:pPr algn="ctr"/>
-            <a:endParaRPr/>
           </a:p>
         </p:txBody>
       </p:sp>
@@ -6233,7 +6161,6 @@
           <a:lstStyle/>
           <a:p>
             <a:pPr algn="ctr"/>
-            <a:endParaRPr/>
           </a:p>
         </p:txBody>
       </p:sp>
@@ -6277,7 +6204,6 @@
           <a:lstStyle/>
           <a:p>
             <a:pPr algn="ctr"/>
-            <a:endParaRPr/>
           </a:p>
         </p:txBody>
       </p:sp>
@@ -6309,6 +6235,7 @@
                 </a:solidFill>
                 <a:latin typeface="Arial"/>
                 <a:ea typeface="微软雅黑"/>
+                <a:latin typeface="Arial"/>
               </a:rPr>
               <a:t>04   FIRST VALUE</a:t>
             </a:r>
@@ -6343,6 +6270,7 @@
                 </a:solidFill>
                 <a:latin typeface="微软雅黑"/>
                 <a:ea typeface="微软雅黑"/>
+                <a:latin typeface="微软雅黑"/>
               </a:rPr>
               <a:t>第一价值：核价不再绑在几个人身上</a:t>
             </a:r>
@@ -6391,7 +6319,6 @@
           <a:lstStyle/>
           <a:p>
             <a:pPr algn="ctr"/>
-            <a:endParaRPr/>
           </a:p>
         </p:txBody>
       </p:sp>
@@ -6435,7 +6362,6 @@
           <a:lstStyle/>
           <a:p>
             <a:pPr algn="ctr"/>
-            <a:endParaRPr/>
           </a:p>
         </p:txBody>
       </p:sp>
@@ -6467,6 +6393,7 @@
                 </a:solidFill>
                 <a:latin typeface="微软雅黑"/>
                 <a:ea typeface="微软雅黑"/>
+                <a:latin typeface="微软雅黑"/>
               </a:rPr>
               <a:t>以前</a:t>
             </a:r>
@@ -6505,6 +6432,7 @@
                 </a:solidFill>
                 <a:latin typeface="微软雅黑"/>
                 <a:ea typeface="微软雅黑"/>
+                <a:latin typeface="微软雅黑"/>
               </a:rPr>
               <a:t>熟练人员</a:t>
             </a:r>
@@ -6522,6 +6450,7 @@
                 </a:solidFill>
                 <a:latin typeface="微软雅黑"/>
                 <a:ea typeface="微软雅黑"/>
+                <a:latin typeface="微软雅黑"/>
               </a:rPr>
               <a:t>好几天</a:t>
             </a:r>
@@ -6560,6 +6489,7 @@
                 </a:solidFill>
                 <a:latin typeface="微软雅黑"/>
                 <a:ea typeface="微软雅黑"/>
+                <a:latin typeface="微软雅黑"/>
               </a:rPr>
               <a:t>一事一议靠骨干手感。人一走，这件事就停。</a:t>
             </a:r>
@@ -6577,6 +6507,7 @@
                 </a:solidFill>
                 <a:latin typeface="微软雅黑"/>
                 <a:ea typeface="微软雅黑"/>
+                <a:latin typeface="微软雅黑"/>
               </a:rPr>
               <a:t>能力属于个人。</a:t>
             </a:r>
@@ -6625,7 +6556,6 @@
           <a:lstStyle/>
           <a:p>
             <a:pPr algn="ctr"/>
-            <a:endParaRPr/>
           </a:p>
         </p:txBody>
       </p:sp>
@@ -6669,7 +6599,6 @@
           <a:lstStyle/>
           <a:p>
             <a:pPr algn="ctr"/>
-            <a:endParaRPr/>
           </a:p>
         </p:txBody>
       </p:sp>
@@ -6701,6 +6630,7 @@
                 </a:solidFill>
                 <a:latin typeface="微软雅黑"/>
                 <a:ea typeface="微软雅黑"/>
+                <a:latin typeface="微软雅黑"/>
               </a:rPr>
               <a:t>现在</a:t>
             </a:r>
@@ -6739,6 +6669,7 @@
                 </a:solidFill>
                 <a:latin typeface="微软雅黑"/>
                 <a:ea typeface="微软雅黑"/>
+                <a:latin typeface="微软雅黑"/>
               </a:rPr>
               <a:t>上传依据</a:t>
             </a:r>
@@ -6756,6 +6687,7 @@
                 </a:solidFill>
                 <a:latin typeface="微软雅黑"/>
                 <a:ea typeface="微软雅黑"/>
+                <a:latin typeface="微软雅黑"/>
               </a:rPr>
               <a:t>约 20 秒</a:t>
             </a:r>
@@ -6794,6 +6726,7 @@
                 </a:solidFill>
                 <a:latin typeface="微软雅黑"/>
                 <a:ea typeface="微软雅黑"/>
+                <a:latin typeface="微软雅黑"/>
               </a:rPr>
               <a:t>规则在引擎里。人请假，总成账和采购账照样能出。能力属于公司。</a:t>
             </a:r>
@@ -6863,6 +6796,7 @@
                 </a:solidFill>
                 <a:latin typeface="微软雅黑"/>
                 <a:ea typeface="微软雅黑"/>
+                <a:latin typeface="微软雅黑"/>
               </a:rPr>
               <a:t>普炳软件  ·  核价平台</a:t>
             </a:r>
@@ -6897,6 +6831,7 @@
                 </a:solidFill>
                 <a:latin typeface="Arial"/>
                 <a:ea typeface="微软雅黑"/>
+                <a:latin typeface="Arial"/>
               </a:rPr>
               <a:t>5 / 9</a:t>
             </a:r>
@@ -6912,7 +6847,7 @@
 </file>
 
 <file path=ppt/slides/slide6.xml><?xml version="1.0" encoding="utf-8"?>
-<p:sld xmlns:a="http://schemas.openxmlformats.org/drawingml/2006/main" xmlns:r="http://schemas.openxmlformats.org/officeDocument/2006/relationships" xmlns:p="http://schemas.openxmlformats.org/presentationml/2006/main">
+<p:sld xmlns:a="http://schemas.openxmlformats.org/drawingml/2006/main" xmlns:p="http://schemas.openxmlformats.org/presentationml/2006/main" xmlns:r="http://schemas.openxmlformats.org/officeDocument/2006/relationships">
   <p:cSld>
     <p:spTree>
       <p:nvGrpSpPr>
@@ -6920,14 +6855,7 @@
         <p:cNvGrpSpPr/>
         <p:nvPr/>
       </p:nvGrpSpPr>
-      <p:grpSpPr>
-        <a:xfrm>
-          <a:off x="0" y="0"/>
-          <a:ext cx="0" cy="0"/>
-          <a:chOff x="0" y="0"/>
-          <a:chExt cx="0" cy="0"/>
-        </a:xfrm>
-      </p:grpSpPr>
+      <p:grpSpPr/>
       <p:sp>
         <p:nvSpPr>
           <p:cNvPr id="2" name="Rectangle 1"/>
@@ -6968,7 +6896,6 @@
           <a:lstStyle/>
           <a:p>
             <a:pPr algn="ctr"/>
-            <a:endParaRPr/>
           </a:p>
         </p:txBody>
       </p:sp>
@@ -7012,7 +6939,6 @@
           <a:lstStyle/>
           <a:p>
             <a:pPr algn="ctr"/>
-            <a:endParaRPr/>
           </a:p>
         </p:txBody>
       </p:sp>
@@ -7056,7 +6982,6 @@
           <a:lstStyle/>
           <a:p>
             <a:pPr algn="ctr"/>
-            <a:endParaRPr/>
           </a:p>
         </p:txBody>
       </p:sp>
@@ -7088,6 +7013,7 @@
                 </a:solidFill>
                 <a:latin typeface="Arial"/>
                 <a:ea typeface="微软雅黑"/>
+                <a:latin typeface="Arial"/>
               </a:rPr>
               <a:t>05   SECOND VALUE</a:t>
             </a:r>
@@ -7122,6 +7048,7 @@
                 </a:solidFill>
                 <a:latin typeface="微软雅黑"/>
                 <a:ea typeface="微软雅黑"/>
+                <a:latin typeface="微软雅黑"/>
               </a:rPr>
               <a:t>第二价值：依据能拿出，就不必再扯皮</a:t>
             </a:r>
@@ -7170,7 +7097,6 @@
           <a:lstStyle/>
           <a:p>
             <a:pPr algn="ctr"/>
-            <a:endParaRPr/>
           </a:p>
         </p:txBody>
       </p:sp>
@@ -7214,7 +7140,6 @@
           <a:lstStyle/>
           <a:p>
             <a:pPr algn="ctr"/>
-            <a:endParaRPr/>
           </a:p>
         </p:txBody>
       </p:sp>
@@ -7246,6 +7171,7 @@
                 </a:solidFill>
                 <a:latin typeface="微软雅黑"/>
                 <a:ea typeface="微软雅黑"/>
+                <a:latin typeface="微软雅黑"/>
               </a:rPr>
               <a:t>哪份文件</a:t>
             </a:r>
@@ -7284,6 +7210,7 @@
                 </a:solidFill>
                 <a:latin typeface="微软雅黑"/>
                 <a:ea typeface="微软雅黑"/>
+                <a:latin typeface="微软雅黑"/>
               </a:rPr>
               <a:t>当时用的 Excel 能找回，不是私人拷贝。</a:t>
             </a:r>
@@ -7332,7 +7259,6 @@
           <a:lstStyle/>
           <a:p>
             <a:pPr algn="ctr"/>
-            <a:endParaRPr/>
           </a:p>
         </p:txBody>
       </p:sp>
@@ -7376,7 +7302,6 @@
           <a:lstStyle/>
           <a:p>
             <a:pPr algn="ctr"/>
-            <a:endParaRPr/>
           </a:p>
         </p:txBody>
       </p:sp>
@@ -7408,6 +7333,7 @@
                 </a:solidFill>
                 <a:latin typeface="微软雅黑"/>
                 <a:ea typeface="微软雅黑"/>
+                <a:latin typeface="微软雅黑"/>
               </a:rPr>
               <a:t>谁操作的</a:t>
             </a:r>
@@ -7446,6 +7372,7 @@
                 </a:solidFill>
                 <a:latin typeface="微软雅黑"/>
                 <a:ea typeface="微软雅黑"/>
+                <a:latin typeface="微软雅黑"/>
               </a:rPr>
               <a:t>上传、计算、变更有日志。对账问记录。</a:t>
             </a:r>
@@ -7494,7 +7421,6 @@
           <a:lstStyle/>
           <a:p>
             <a:pPr algn="ctr"/>
-            <a:endParaRPr/>
           </a:p>
         </p:txBody>
       </p:sp>
@@ -7538,7 +7464,6 @@
           <a:lstStyle/>
           <a:p>
             <a:pPr algn="ctr"/>
-            <a:endParaRPr/>
           </a:p>
         </p:txBody>
       </p:sp>
@@ -7570,6 +7495,7 @@
                 </a:solidFill>
                 <a:latin typeface="微软雅黑"/>
                 <a:ea typeface="微软雅黑"/>
+                <a:latin typeface="微软雅黑"/>
               </a:rPr>
               <a:t>当期哪版</a:t>
             </a:r>
@@ -7608,6 +7534,7 @@
                 </a:solidFill>
                 <a:latin typeface="微软雅黑"/>
                 <a:ea typeface="微软雅黑"/>
+                <a:latin typeface="微软雅黑"/>
               </a:rPr>
               <a:t>钢价、BOM、工艺、设变按月对齐。</a:t>
             </a:r>
@@ -7656,7 +7583,6 @@
           <a:lstStyle/>
           <a:p>
             <a:pPr algn="ctr"/>
-            <a:endParaRPr/>
           </a:p>
         </p:txBody>
       </p:sp>
@@ -7700,7 +7626,6 @@
           <a:lstStyle/>
           <a:p>
             <a:pPr algn="ctr"/>
-            <a:endParaRPr/>
           </a:p>
         </p:txBody>
       </p:sp>
@@ -7732,6 +7657,7 @@
                 </a:solidFill>
                 <a:latin typeface="微软雅黑"/>
                 <a:ea typeface="微软雅黑"/>
+                <a:latin typeface="微软雅黑"/>
               </a:rPr>
               <a:t>同一套规则</a:t>
             </a:r>
@@ -7770,6 +7696,7 @@
                 </a:solidFill>
                 <a:latin typeface="微软雅黑"/>
                 <a:ea typeface="微软雅黑"/>
+                <a:latin typeface="微软雅黑"/>
               </a:rPr>
               <a:t>开给奇瑞和付给二级商，同一引擎。</a:t>
             </a:r>
@@ -7839,6 +7766,7 @@
                 </a:solidFill>
                 <a:latin typeface="微软雅黑"/>
                 <a:ea typeface="微软雅黑"/>
+                <a:latin typeface="微软雅黑"/>
               </a:rPr>
               <a:t>普炳软件  ·  核价平台</a:t>
             </a:r>
@@ -7873,6 +7801,7 @@
                 </a:solidFill>
                 <a:latin typeface="Arial"/>
                 <a:ea typeface="微软雅黑"/>
+                <a:latin typeface="Arial"/>
               </a:rPr>
               <a:t>6 / 9</a:t>
             </a:r>
@@ -7888,7 +7817,7 @@
 </file>
 
 <file path=ppt/slides/slide7.xml><?xml version="1.0" encoding="utf-8"?>
-<p:sld xmlns:a="http://schemas.openxmlformats.org/drawingml/2006/main" xmlns:r="http://schemas.openxmlformats.org/officeDocument/2006/relationships" xmlns:p="http://schemas.openxmlformats.org/presentationml/2006/main">
+<p:sld xmlns:a="http://schemas.openxmlformats.org/drawingml/2006/main" xmlns:p="http://schemas.openxmlformats.org/presentationml/2006/main" xmlns:r="http://schemas.openxmlformats.org/officeDocument/2006/relationships">
   <p:cSld>
     <p:spTree>
       <p:nvGrpSpPr>
@@ -7896,14 +7825,7 @@
         <p:cNvGrpSpPr/>
         <p:nvPr/>
       </p:nvGrpSpPr>
-      <p:grpSpPr>
-        <a:xfrm>
-          <a:off x="0" y="0"/>
-          <a:ext cx="0" cy="0"/>
-          <a:chOff x="0" y="0"/>
-          <a:chExt cx="0" cy="0"/>
-        </a:xfrm>
-      </p:grpSpPr>
+      <p:grpSpPr/>
       <p:sp>
         <p:nvSpPr>
           <p:cNvPr id="2" name="Rectangle 1"/>
@@ -7944,7 +7866,6 @@
           <a:lstStyle/>
           <a:p>
             <a:pPr algn="ctr"/>
-            <a:endParaRPr/>
           </a:p>
         </p:txBody>
       </p:sp>
@@ -7988,7 +7909,6 @@
           <a:lstStyle/>
           <a:p>
             <a:pPr algn="ctr"/>
-            <a:endParaRPr/>
           </a:p>
         </p:txBody>
       </p:sp>
@@ -8032,7 +7952,6 @@
           <a:lstStyle/>
           <a:p>
             <a:pPr algn="ctr"/>
-            <a:endParaRPr/>
           </a:p>
         </p:txBody>
       </p:sp>
@@ -8064,6 +7983,7 @@
                 </a:solidFill>
                 <a:latin typeface="Arial"/>
                 <a:ea typeface="微软雅黑"/>
+                <a:latin typeface="Arial"/>
               </a:rPr>
               <a:t>06   THE LEVER</a:t>
             </a:r>
@@ -8098,6 +8018,7 @@
                 </a:solidFill>
                 <a:latin typeface="微软雅黑"/>
                 <a:ea typeface="微软雅黑"/>
+                <a:latin typeface="微软雅黑"/>
               </a:rPr>
               <a:t>所以数字化、AI 落地，核价是最好的抓手</a:t>
             </a:r>
@@ -8132,6 +8053,7 @@
                 </a:solidFill>
                 <a:latin typeface="微软雅黑"/>
                 <a:ea typeface="微软雅黑"/>
+                <a:latin typeface="微软雅黑"/>
               </a:rPr>
               <a:t>建设不是再上一个聊天工具。是把最痛、最有规则、立刻碰到钱的事做成公司能力。</a:t>
             </a:r>
@@ -8180,7 +8102,6 @@
           <a:lstStyle/>
           <a:p>
             <a:pPr algn="ctr"/>
-            <a:endParaRPr/>
           </a:p>
         </p:txBody>
       </p:sp>
@@ -8224,7 +8145,6 @@
           <a:lstStyle/>
           <a:p>
             <a:pPr algn="ctr"/>
-            <a:endParaRPr/>
           </a:p>
         </p:txBody>
       </p:sp>
@@ -8256,6 +8176,7 @@
                 </a:solidFill>
                 <a:latin typeface="微软雅黑"/>
                 <a:ea typeface="微软雅黑"/>
+                <a:latin typeface="微软雅黑"/>
               </a:rPr>
               <a:t>有规则</a:t>
             </a:r>
@@ -8294,6 +8215,7 @@
                 </a:solidFill>
                 <a:latin typeface="微软雅黑"/>
                 <a:ea typeface="微软雅黑"/>
+                <a:latin typeface="微软雅黑"/>
               </a:rPr>
               <a:t>钢价政策、工艺、BOM、设变，本来就有企业口径。</a:t>
             </a:r>
@@ -8311,6 +8233,7 @@
                 </a:solidFill>
                 <a:latin typeface="微软雅黑"/>
                 <a:ea typeface="微软雅黑"/>
+                <a:latin typeface="微软雅黑"/>
               </a:rPr>
               <a:t>适合写成引擎，而不是口头 AI。</a:t>
             </a:r>
@@ -8359,7 +8282,6 @@
           <a:lstStyle/>
           <a:p>
             <a:pPr algn="ctr"/>
-            <a:endParaRPr/>
           </a:p>
         </p:txBody>
       </p:sp>
@@ -8403,7 +8325,6 @@
           <a:lstStyle/>
           <a:p>
             <a:pPr algn="ctr"/>
-            <a:endParaRPr/>
           </a:p>
         </p:txBody>
       </p:sp>
@@ -8435,6 +8356,7 @@
                 </a:solidFill>
                 <a:latin typeface="微软雅黑"/>
                 <a:ea typeface="微软雅黑"/>
+                <a:latin typeface="微软雅黑"/>
               </a:rPr>
               <a:t>有真账</a:t>
             </a:r>
@@ -8473,6 +8395,7 @@
                 </a:solidFill>
                 <a:latin typeface="微软雅黑"/>
                 <a:ea typeface="微软雅黑"/>
+                <a:latin typeface="微软雅黑"/>
               </a:rPr>
               <a:t>开给奇瑞的总成价、付给二级商的采购价，每月都要对。</a:t>
             </a:r>
@@ -8490,6 +8413,7 @@
                 </a:solidFill>
                 <a:latin typeface="微软雅黑"/>
                 <a:ea typeface="微软雅黑"/>
+                <a:latin typeface="微软雅黑"/>
               </a:rPr>
               <a:t>建设立刻碰到钱。</a:t>
             </a:r>
@@ -8538,7 +8462,6 @@
           <a:lstStyle/>
           <a:p>
             <a:pPr algn="ctr"/>
-            <a:endParaRPr/>
           </a:p>
         </p:txBody>
       </p:sp>
@@ -8582,7 +8505,6 @@
           <a:lstStyle/>
           <a:p>
             <a:pPr algn="ctr"/>
-            <a:endParaRPr/>
           </a:p>
         </p:txBody>
       </p:sp>
@@ -8614,6 +8536,7 @@
                 </a:solidFill>
                 <a:latin typeface="微软雅黑"/>
                 <a:ea typeface="微软雅黑"/>
+                <a:latin typeface="微软雅黑"/>
               </a:rPr>
               <a:t>能见效</a:t>
             </a:r>
@@ -8652,6 +8575,7 @@
                 </a:solidFill>
                 <a:latin typeface="微软雅黑"/>
                 <a:ea typeface="微软雅黑"/>
+                <a:latin typeface="微软雅黑"/>
               </a:rPr>
               <a:t>账能复算、人能交接、依据能拿出。</a:t>
             </a:r>
@@ -8669,6 +8593,7 @@
                 </a:solidFill>
                 <a:latin typeface="微软雅黑"/>
                 <a:ea typeface="微软雅黑"/>
+                <a:latin typeface="微软雅黑"/>
               </a:rPr>
               <a:t>AI 问的是这本真账，不是编一个价。</a:t>
             </a:r>
@@ -8738,6 +8663,7 @@
                 </a:solidFill>
                 <a:latin typeface="微软雅黑"/>
                 <a:ea typeface="微软雅黑"/>
+                <a:latin typeface="微软雅黑"/>
               </a:rPr>
               <a:t>普炳软件  ·  核价平台</a:t>
             </a:r>
@@ -8772,6 +8698,7 @@
                 </a:solidFill>
                 <a:latin typeface="Arial"/>
                 <a:ea typeface="微软雅黑"/>
+                <a:latin typeface="Arial"/>
               </a:rPr>
               <a:t>7 / 9</a:t>
             </a:r>
@@ -8787,7 +8714,7 @@
 </file>
 
 <file path=ppt/slides/slide8.xml><?xml version="1.0" encoding="utf-8"?>
-<p:sld xmlns:a="http://schemas.openxmlformats.org/drawingml/2006/main" xmlns:r="http://schemas.openxmlformats.org/officeDocument/2006/relationships" xmlns:p="http://schemas.openxmlformats.org/presentationml/2006/main">
+<p:sld xmlns:a="http://schemas.openxmlformats.org/drawingml/2006/main" xmlns:p="http://schemas.openxmlformats.org/presentationml/2006/main" xmlns:r="http://schemas.openxmlformats.org/officeDocument/2006/relationships">
   <p:cSld>
     <p:spTree>
       <p:nvGrpSpPr>
@@ -8795,14 +8722,7 @@
         <p:cNvGrpSpPr/>
         <p:nvPr/>
       </p:nvGrpSpPr>
-      <p:grpSpPr>
-        <a:xfrm>
-          <a:off x="0" y="0"/>
-          <a:ext cx="0" cy="0"/>
-          <a:chOff x="0" y="0"/>
-          <a:chExt cx="0" cy="0"/>
-        </a:xfrm>
-      </p:grpSpPr>
+      <p:grpSpPr/>
       <p:sp>
         <p:nvSpPr>
           <p:cNvPr id="2" name="Rectangle 1"/>
@@ -8843,7 +8763,6 @@
           <a:lstStyle/>
           <a:p>
             <a:pPr algn="ctr"/>
-            <a:endParaRPr/>
           </a:p>
         </p:txBody>
       </p:sp>
@@ -8887,7 +8806,6 @@
           <a:lstStyle/>
           <a:p>
             <a:pPr algn="ctr"/>
-            <a:endParaRPr/>
           </a:p>
         </p:txBody>
       </p:sp>
@@ -8931,7 +8849,6 @@
           <a:lstStyle/>
           <a:p>
             <a:pPr algn="ctr"/>
-            <a:endParaRPr/>
           </a:p>
         </p:txBody>
       </p:sp>
@@ -8963,6 +8880,7 @@
                 </a:solidFill>
                 <a:latin typeface="Arial"/>
                 <a:ea typeface="微软雅黑"/>
+                <a:latin typeface="Arial"/>
               </a:rPr>
               <a:t>07   THE PLATFORM</a:t>
             </a:r>
@@ -8997,6 +8915,7 @@
                 </a:solidFill>
                 <a:latin typeface="微软雅黑"/>
                 <a:ea typeface="微软雅黑"/>
+                <a:latin typeface="微软雅黑"/>
               </a:rPr>
               <a:t>平台管这些依据，算出那两本账</a:t>
             </a:r>
@@ -9031,6 +8950,7 @@
                 </a:solidFill>
                 <a:latin typeface="微软雅黑"/>
                 <a:ea typeface="微软雅黑"/>
+                <a:latin typeface="微软雅黑"/>
               </a:rPr>
               <a:t>细则见面看。这一页只回答：它究竟管什么。</a:t>
             </a:r>
@@ -9079,7 +8999,6 @@
           <a:lstStyle/>
           <a:p>
             <a:pPr algn="ctr"/>
-            <a:endParaRPr/>
           </a:p>
         </p:txBody>
       </p:sp>
@@ -9123,7 +9042,6 @@
           <a:lstStyle/>
           <a:p>
             <a:pPr algn="ctr"/>
-            <a:endParaRPr/>
           </a:p>
         </p:txBody>
       </p:sp>
@@ -9155,6 +9073,7 @@
                 </a:solidFill>
                 <a:latin typeface="Arial"/>
                 <a:ea typeface="微软雅黑"/>
+                <a:latin typeface="Arial"/>
               </a:rPr>
               <a:t>Policy</a:t>
             </a:r>
@@ -9189,6 +9108,7 @@
                 </a:solidFill>
                 <a:latin typeface="微软雅黑"/>
                 <a:ea typeface="微软雅黑"/>
+                <a:latin typeface="微软雅黑"/>
               </a:rPr>
               <a:t>钢价一事一议</a:t>
             </a:r>
@@ -9237,7 +9157,6 @@
           <a:lstStyle/>
           <a:p>
             <a:pPr algn="ctr"/>
-            <a:endParaRPr/>
           </a:p>
         </p:txBody>
       </p:sp>
@@ -9281,7 +9200,6 @@
           <a:lstStyle/>
           <a:p>
             <a:pPr algn="ctr"/>
-            <a:endParaRPr/>
           </a:p>
         </p:txBody>
       </p:sp>
@@ -9313,6 +9231,7 @@
                 </a:solidFill>
                 <a:latin typeface="Arial"/>
                 <a:ea typeface="微软雅黑"/>
+                <a:latin typeface="Arial"/>
               </a:rPr>
               <a:t>BOM</a:t>
             </a:r>
@@ -9347,6 +9266,7 @@
                 </a:solidFill>
                 <a:latin typeface="微软雅黑"/>
                 <a:ea typeface="微软雅黑"/>
+                <a:latin typeface="微软雅黑"/>
               </a:rPr>
               <a:t>结构与外购</a:t>
             </a:r>
@@ -9395,7 +9315,6 @@
           <a:lstStyle/>
           <a:p>
             <a:pPr algn="ctr"/>
-            <a:endParaRPr/>
           </a:p>
         </p:txBody>
       </p:sp>
@@ -9439,7 +9358,6 @@
           <a:lstStyle/>
           <a:p>
             <a:pPr algn="ctr"/>
-            <a:endParaRPr/>
           </a:p>
         </p:txBody>
       </p:sp>
@@ -9471,6 +9389,7 @@
                 </a:solidFill>
                 <a:latin typeface="Arial"/>
                 <a:ea typeface="微软雅黑"/>
+                <a:latin typeface="Arial"/>
               </a:rPr>
               <a:t>Process</a:t>
             </a:r>
@@ -9505,6 +9424,7 @@
                 </a:solidFill>
                 <a:latin typeface="微软雅黑"/>
                 <a:ea typeface="微软雅黑"/>
+                <a:latin typeface="微软雅黑"/>
               </a:rPr>
               <a:t>工艺与模具</a:t>
             </a:r>
@@ -9553,7 +9473,6 @@
           <a:lstStyle/>
           <a:p>
             <a:pPr algn="ctr"/>
-            <a:endParaRPr/>
           </a:p>
         </p:txBody>
       </p:sp>
@@ -9597,7 +9516,6 @@
           <a:lstStyle/>
           <a:p>
             <a:pPr algn="ctr"/>
-            <a:endParaRPr/>
           </a:p>
         </p:txBody>
       </p:sp>
@@ -9629,6 +9547,7 @@
                 </a:solidFill>
                 <a:latin typeface="Arial"/>
                 <a:ea typeface="微软雅黑"/>
+                <a:latin typeface="Arial"/>
               </a:rPr>
               <a:t>Change</a:t>
             </a:r>
@@ -9663,6 +9582,7 @@
                 </a:solidFill>
                 <a:latin typeface="微软雅黑"/>
                 <a:ea typeface="微软雅黑"/>
+                <a:latin typeface="微软雅黑"/>
               </a:rPr>
               <a:t>工程变更</a:t>
             </a:r>
@@ -9711,7 +9631,6 @@
           <a:lstStyle/>
           <a:p>
             <a:pPr algn="ctr"/>
-            <a:endParaRPr/>
           </a:p>
         </p:txBody>
       </p:sp>
@@ -9755,7 +9674,6 @@
           <a:lstStyle/>
           <a:p>
             <a:pPr algn="ctr"/>
-            <a:endParaRPr/>
           </a:p>
         </p:txBody>
       </p:sp>
@@ -9787,6 +9705,7 @@
                 </a:solidFill>
                 <a:latin typeface="Arial"/>
                 <a:ea typeface="微软雅黑"/>
+                <a:latin typeface="Arial"/>
               </a:rPr>
               <a:t>Costing</a:t>
             </a:r>
@@ -9821,6 +9740,7 @@
                 </a:solidFill>
                 <a:latin typeface="微软雅黑"/>
                 <a:ea typeface="微软雅黑"/>
+                <a:latin typeface="微软雅黑"/>
               </a:rPr>
               <a:t>件价与总成</a:t>
             </a:r>
@@ -9869,7 +9789,6 @@
           <a:lstStyle/>
           <a:p>
             <a:pPr algn="ctr"/>
-            <a:endParaRPr/>
           </a:p>
         </p:txBody>
       </p:sp>
@@ -9913,7 +9832,6 @@
           <a:lstStyle/>
           <a:p>
             <a:pPr algn="ctr"/>
-            <a:endParaRPr/>
           </a:p>
         </p:txBody>
       </p:sp>
@@ -9945,6 +9863,7 @@
                 </a:solidFill>
                 <a:latin typeface="Arial"/>
                 <a:ea typeface="微软雅黑"/>
+                <a:latin typeface="Arial"/>
               </a:rPr>
               <a:t>Contract</a:t>
             </a:r>
@@ -9979,6 +9898,7 @@
                 </a:solidFill>
                 <a:latin typeface="微软雅黑"/>
                 <a:ea typeface="微软雅黑"/>
+                <a:latin typeface="微软雅黑"/>
               </a:rPr>
               <a:t>采购协议</a:t>
             </a:r>
@@ -10048,6 +9968,7 @@
                 </a:solidFill>
                 <a:latin typeface="微软雅黑"/>
                 <a:ea typeface="微软雅黑"/>
+                <a:latin typeface="微软雅黑"/>
               </a:rPr>
               <a:t>普炳软件  ·  核价平台</a:t>
             </a:r>
@@ -10082,6 +10003,7 @@
                 </a:solidFill>
                 <a:latin typeface="Arial"/>
                 <a:ea typeface="微软雅黑"/>
+                <a:latin typeface="Arial"/>
               </a:rPr>
               <a:t>8 / 9</a:t>
             </a:r>
@@ -10097,7 +10019,7 @@
 </file>
 
 <file path=ppt/slides/slide9.xml><?xml version="1.0" encoding="utf-8"?>
-<p:sld xmlns:a="http://schemas.openxmlformats.org/drawingml/2006/main" xmlns:r="http://schemas.openxmlformats.org/officeDocument/2006/relationships" xmlns:p="http://schemas.openxmlformats.org/presentationml/2006/main">
+<p:sld xmlns:a="http://schemas.openxmlformats.org/drawingml/2006/main" xmlns:p="http://schemas.openxmlformats.org/presentationml/2006/main" xmlns:r="http://schemas.openxmlformats.org/officeDocument/2006/relationships">
   <p:cSld>
     <p:spTree>
       <p:nvGrpSpPr>
@@ -10105,14 +10027,7 @@
         <p:cNvGrpSpPr/>
         <p:nvPr/>
       </p:nvGrpSpPr>
-      <p:grpSpPr>
-        <a:xfrm>
-          <a:off x="0" y="0"/>
-          <a:ext cx="0" cy="0"/>
-          <a:chOff x="0" y="0"/>
-          <a:chExt cx="0" cy="0"/>
-        </a:xfrm>
-      </p:grpSpPr>
+      <p:grpSpPr/>
       <p:sp>
         <p:nvSpPr>
           <p:cNvPr id="2" name="Rectangle 1"/>
@@ -10153,7 +10068,6 @@
           <a:lstStyle/>
           <a:p>
             <a:pPr algn="ctr"/>
-            <a:endParaRPr/>
           </a:p>
         </p:txBody>
       </p:sp>
@@ -10197,7 +10111,6 @@
           <a:lstStyle/>
           <a:p>
             <a:pPr algn="ctr"/>
-            <a:endParaRPr/>
           </a:p>
         </p:txBody>
       </p:sp>
@@ -10264,6 +10177,7 @@
                 </a:solidFill>
                 <a:latin typeface="Arial"/>
                 <a:ea typeface="微软雅黑"/>
+                <a:latin typeface="Arial"/>
               </a:rPr>
               <a:t>COME SEE</a:t>
             </a:r>
@@ -10298,6 +10212,7 @@
                 </a:solidFill>
                 <a:latin typeface="微软雅黑"/>
                 <a:ea typeface="微软雅黑"/>
+                <a:latin typeface="微软雅黑"/>
               </a:rPr>
               <a:t>请来看三件事。</a:t>
             </a:r>
@@ -10332,6 +10247,7 @@
                 </a:solidFill>
                 <a:latin typeface="Arial"/>
                 <a:ea typeface="微软雅黑"/>
+                <a:latin typeface="Arial"/>
               </a:rPr>
               <a:t>01</a:t>
             </a:r>
@@ -10366,6 +10282,7 @@
                 </a:solidFill>
                 <a:latin typeface="微软雅黑"/>
                 <a:ea typeface="微软雅黑"/>
+                <a:latin typeface="微软雅黑"/>
               </a:rPr>
               <a:t>人走了，账还在不在。</a:t>
             </a:r>
@@ -10400,6 +10317,7 @@
                 </a:solidFill>
                 <a:latin typeface="Arial"/>
                 <a:ea typeface="微软雅黑"/>
+                <a:latin typeface="Arial"/>
               </a:rPr>
               <a:t>02</a:t>
             </a:r>
@@ -10434,6 +10352,7 @@
                 </a:solidFill>
                 <a:latin typeface="微软雅黑"/>
                 <a:ea typeface="微软雅黑"/>
+                <a:latin typeface="微软雅黑"/>
               </a:rPr>
               <a:t>依据能不能当场拿出。</a:t>
             </a:r>
@@ -10468,6 +10387,7 @@
                 </a:solidFill>
                 <a:latin typeface="Arial"/>
                 <a:ea typeface="微软雅黑"/>
+                <a:latin typeface="Arial"/>
               </a:rPr>
               <a:t>03</a:t>
             </a:r>
@@ -10502,6 +10422,7 @@
                 </a:solidFill>
                 <a:latin typeface="微软雅黑"/>
                 <a:ea typeface="微软雅黑"/>
+                <a:latin typeface="微软雅黑"/>
               </a:rPr>
               <a:t>约 20 秒，两本账能不能出清。</a:t>
             </a:r>
@@ -10536,6 +10457,7 @@
                 </a:solidFill>
                 <a:latin typeface="微软雅黑"/>
                 <a:ea typeface="微软雅黑"/>
+                <a:latin typeface="微软雅黑"/>
               </a:rPr>
               <a:t>先把核价做成公司能力。数字化建设和 AI 落地，就有了抓手。</a:t>
             </a:r>
@@ -10570,6 +10492,7 @@
                 </a:solidFill>
                 <a:latin typeface="微软雅黑"/>
                 <a:ea typeface="微软雅黑"/>
+                <a:latin typeface="微软雅黑"/>
               </a:rPr>
               <a:t>普炳软件</a:t>
             </a:r>
@@ -10604,6 +10527,7 @@
                 </a:solidFill>
                 <a:latin typeface="Arial"/>
                 <a:ea typeface="微软雅黑"/>
+                <a:latin typeface="Arial"/>
               </a:rPr>
               <a:t>9 / 9</a:t>
             </a:r>
